--- a/u08d_pQueues/notes/_a.priorityQueues.pptx
+++ b/u08d_pQueues/notes/_a.priorityQueues.pptx
@@ -5,10 +5,10 @@
     <p:sldMasterId id="2147483648" r:id="rId1"/>
   </p:sldMasterIdLst>
   <p:notesMasterIdLst>
-    <p:notesMasterId r:id="rId19"/>
+    <p:notesMasterId r:id="rId22"/>
   </p:notesMasterIdLst>
   <p:handoutMasterIdLst>
-    <p:handoutMasterId r:id="rId20"/>
+    <p:handoutMasterId r:id="rId23"/>
   </p:handoutMasterIdLst>
   <p:sldIdLst>
     <p:sldId id="257" r:id="rId2"/>
@@ -28,6 +28,9 @@
     <p:sldId id="314" r:id="rId16"/>
     <p:sldId id="316" r:id="rId17"/>
     <p:sldId id="301" r:id="rId18"/>
+    <p:sldId id="346" r:id="rId19"/>
+    <p:sldId id="347" r:id="rId20"/>
+    <p:sldId id="348" r:id="rId21"/>
   </p:sldIdLst>
   <p:sldSz cx="9144000" cy="6858000" type="screen4x3"/>
   <p:notesSz cx="6858000" cy="9144000"/>
@@ -1754,6 +1757,224 @@
         </p:txBody>
       </p:sp>
     </p:spTree>
+  </p:cSld>
+  <p:clrMapOvr>
+    <a:masterClrMapping/>
+  </p:clrMapOvr>
+</p:notes>
+</file>
+
+<file path=ppt/notesSlides/notesSlide5.xml><?xml version="1.0" encoding="utf-8"?>
+<p:notes xmlns:a="http://schemas.openxmlformats.org/drawingml/2006/main" xmlns:r="http://schemas.openxmlformats.org/officeDocument/2006/relationships" xmlns:p="http://schemas.openxmlformats.org/presentationml/2006/main">
+  <p:cSld>
+    <p:spTree>
+      <p:nvGrpSpPr>
+        <p:cNvPr id="1" name="">
+          <a:extLst>
+            <a:ext uri="{FF2B5EF4-FFF2-40B4-BE49-F238E27FC236}">
+              <a16:creationId xmlns:a16="http://schemas.microsoft.com/office/drawing/2014/main" id="{E1C3339E-9157-FF7A-A564-9F3CC125236E}"/>
+            </a:ext>
+          </a:extLst>
+        </p:cNvPr>
+        <p:cNvGrpSpPr/>
+        <p:nvPr/>
+      </p:nvGrpSpPr>
+      <p:grpSpPr>
+        <a:xfrm>
+          <a:off x="0" y="0"/>
+          <a:ext cx="0" cy="0"/>
+          <a:chOff x="0" y="0"/>
+          <a:chExt cx="0" cy="0"/>
+        </a:xfrm>
+      </p:grpSpPr>
+      <p:sp>
+        <p:nvSpPr>
+          <p:cNvPr id="11266" name="Slide Image Placeholder 1">
+            <a:extLst>
+              <a:ext uri="{FF2B5EF4-FFF2-40B4-BE49-F238E27FC236}">
+                <a16:creationId xmlns:a16="http://schemas.microsoft.com/office/drawing/2014/main" id="{73F03A6A-A043-6FC0-4A22-8C2C66142DA9}"/>
+              </a:ext>
+            </a:extLst>
+          </p:cNvPr>
+          <p:cNvSpPr>
+            <a:spLocks noGrp="1" noRot="1" noChangeAspect="1" noChangeArrowheads="1" noTextEdit="1"/>
+          </p:cNvSpPr>
+          <p:nvPr>
+            <p:ph type="sldImg"/>
+          </p:nvPr>
+        </p:nvSpPr>
+        <p:spPr>
+          <a:ln/>
+        </p:spPr>
+      </p:sp>
+      <p:sp>
+        <p:nvSpPr>
+          <p:cNvPr id="11267" name="Notes Placeholder 2">
+            <a:extLst>
+              <a:ext uri="{FF2B5EF4-FFF2-40B4-BE49-F238E27FC236}">
+                <a16:creationId xmlns:a16="http://schemas.microsoft.com/office/drawing/2014/main" id="{C943F596-C4A4-8481-4CD1-26A6A1B77AA0}"/>
+              </a:ext>
+            </a:extLst>
+          </p:cNvPr>
+          <p:cNvSpPr>
+            <a:spLocks noGrp="1" noChangeArrowheads="1"/>
+          </p:cNvSpPr>
+          <p:nvPr>
+            <p:ph type="body" idx="1"/>
+          </p:nvPr>
+        </p:nvSpPr>
+        <p:spPr>
+          <a:noFill/>
+        </p:spPr>
+        <p:txBody>
+          <a:bodyPr/>
+          <a:lstStyle/>
+          <a:p>
+            <a:r>
+              <a:rPr lang="en-US" altLang="en-US"/>
+              <a:t>The built-in iterator does not traverse the data structure in any particular order because the underlying data structure doesn't support it. A binary heap is only partially ordered, with the smallest element at the root. When you remove that, the heap is reordered so that the next smallest element is at the root. There is no efficient ordered traversal algorithm so none is provided in Java. </a:t>
+            </a:r>
+          </a:p>
+          <a:p>
+            <a:endParaRPr lang="en-US" altLang="en-US"/>
+          </a:p>
+        </p:txBody>
+      </p:sp>
+      <p:sp>
+        <p:nvSpPr>
+          <p:cNvPr id="11268" name="Slide Number Placeholder 3">
+            <a:extLst>
+              <a:ext uri="{FF2B5EF4-FFF2-40B4-BE49-F238E27FC236}">
+                <a16:creationId xmlns:a16="http://schemas.microsoft.com/office/drawing/2014/main" id="{169C1337-6E4F-A103-3E0E-6D84F4153575}"/>
+              </a:ext>
+            </a:extLst>
+          </p:cNvPr>
+          <p:cNvSpPr>
+            <a:spLocks noGrp="1"/>
+          </p:cNvSpPr>
+          <p:nvPr>
+            <p:ph type="sldNum" sz="quarter" idx="5"/>
+          </p:nvPr>
+        </p:nvSpPr>
+        <p:spPr>
+          <a:noFill/>
+        </p:spPr>
+        <p:txBody>
+          <a:bodyPr/>
+          <a:lstStyle>
+            <a:lvl1pPr algn="r">
+              <a:defRPr sz="2800" b="1">
+                <a:solidFill>
+                  <a:schemeClr val="tx1"/>
+                </a:solidFill>
+                <a:latin typeface="Tahoma" panose="020B0604030504040204" pitchFamily="34" charset="0"/>
+              </a:defRPr>
+            </a:lvl1pPr>
+            <a:lvl2pPr marL="742950" indent="-285750" algn="r">
+              <a:defRPr sz="2800" b="1">
+                <a:solidFill>
+                  <a:schemeClr val="tx1"/>
+                </a:solidFill>
+                <a:latin typeface="Tahoma" panose="020B0604030504040204" pitchFamily="34" charset="0"/>
+              </a:defRPr>
+            </a:lvl2pPr>
+            <a:lvl3pPr marL="1143000" indent="-228600" algn="r">
+              <a:defRPr sz="2800" b="1">
+                <a:solidFill>
+                  <a:schemeClr val="tx1"/>
+                </a:solidFill>
+                <a:latin typeface="Tahoma" panose="020B0604030504040204" pitchFamily="34" charset="0"/>
+              </a:defRPr>
+            </a:lvl3pPr>
+            <a:lvl4pPr marL="1600200" indent="-228600" algn="r">
+              <a:defRPr sz="2800" b="1">
+                <a:solidFill>
+                  <a:schemeClr val="tx1"/>
+                </a:solidFill>
+                <a:latin typeface="Tahoma" panose="020B0604030504040204" pitchFamily="34" charset="0"/>
+              </a:defRPr>
+            </a:lvl4pPr>
+            <a:lvl5pPr marL="2057400" indent="-228600" algn="r">
+              <a:defRPr sz="2800" b="1">
+                <a:solidFill>
+                  <a:schemeClr val="tx1"/>
+                </a:solidFill>
+                <a:latin typeface="Tahoma" panose="020B0604030504040204" pitchFamily="34" charset="0"/>
+              </a:defRPr>
+            </a:lvl5pPr>
+            <a:lvl6pPr marL="2514600" indent="-228600" algn="r" eaLnBrk="0" fontAlgn="base" hangingPunct="0">
+              <a:spcBef>
+                <a:spcPct val="0"/>
+              </a:spcBef>
+              <a:spcAft>
+                <a:spcPct val="0"/>
+              </a:spcAft>
+              <a:defRPr sz="2800" b="1">
+                <a:solidFill>
+                  <a:schemeClr val="tx1"/>
+                </a:solidFill>
+                <a:latin typeface="Tahoma" panose="020B0604030504040204" pitchFamily="34" charset="0"/>
+              </a:defRPr>
+            </a:lvl6pPr>
+            <a:lvl7pPr marL="2971800" indent="-228600" algn="r" eaLnBrk="0" fontAlgn="base" hangingPunct="0">
+              <a:spcBef>
+                <a:spcPct val="0"/>
+              </a:spcBef>
+              <a:spcAft>
+                <a:spcPct val="0"/>
+              </a:spcAft>
+              <a:defRPr sz="2800" b="1">
+                <a:solidFill>
+                  <a:schemeClr val="tx1"/>
+                </a:solidFill>
+                <a:latin typeface="Tahoma" panose="020B0604030504040204" pitchFamily="34" charset="0"/>
+              </a:defRPr>
+            </a:lvl7pPr>
+            <a:lvl8pPr marL="3429000" indent="-228600" algn="r" eaLnBrk="0" fontAlgn="base" hangingPunct="0">
+              <a:spcBef>
+                <a:spcPct val="0"/>
+              </a:spcBef>
+              <a:spcAft>
+                <a:spcPct val="0"/>
+              </a:spcAft>
+              <a:defRPr sz="2800" b="1">
+                <a:solidFill>
+                  <a:schemeClr val="tx1"/>
+                </a:solidFill>
+                <a:latin typeface="Tahoma" panose="020B0604030504040204" pitchFamily="34" charset="0"/>
+              </a:defRPr>
+            </a:lvl8pPr>
+            <a:lvl9pPr marL="3886200" indent="-228600" algn="r" eaLnBrk="0" fontAlgn="base" hangingPunct="0">
+              <a:spcBef>
+                <a:spcPct val="0"/>
+              </a:spcBef>
+              <a:spcAft>
+                <a:spcPct val="0"/>
+              </a:spcAft>
+              <a:defRPr sz="2800" b="1">
+                <a:solidFill>
+                  <a:schemeClr val="tx1"/>
+                </a:solidFill>
+                <a:latin typeface="Tahoma" panose="020B0604030504040204" pitchFamily="34" charset="0"/>
+              </a:defRPr>
+            </a:lvl9pPr>
+          </a:lstStyle>
+          <a:p>
+            <a:fld id="{60700D2D-1526-4527-B64E-134A55EA6A84}" type="slidenum">
+              <a:rPr lang="en-US" altLang="en-US" sz="1200"/>
+              <a:pPr/>
+              <a:t>18</a:t>
+            </a:fld>
+            <a:endParaRPr lang="en-US" altLang="en-US" sz="1200"/>
+          </a:p>
+        </p:txBody>
+      </p:sp>
+    </p:spTree>
+    <p:extLst>
+      <p:ext uri="{BB962C8B-B14F-4D97-AF65-F5344CB8AC3E}">
+        <p14:creationId xmlns:p14="http://schemas.microsoft.com/office/powerpoint/2010/main" val="2115011320"/>
+      </p:ext>
+    </p:extLst>
   </p:cSld>
   <p:clrMapOvr>
     <a:masterClrMapping/>
@@ -9748,7 +9969,7 @@
               <a:rPr lang="en-US" altLang="en-US" sz="2800" dirty="0">
                 <a:latin typeface="Tahoma" panose="020B0604030504040204" pitchFamily="34" charset="0"/>
               </a:rPr>
-              <a:t>&lt;Integer&gt;();</a:t>
+              <a:t>&lt;&gt;();</a:t>
             </a:r>
             <a:br>
               <a:rPr lang="en-US" altLang="en-US" sz="2800" dirty="0">
@@ -11592,7 +11813,7 @@
         <p:spPr bwMode="auto">
           <a:xfrm>
             <a:off x="609600" y="1600200"/>
-            <a:ext cx="8077200" cy="4789488"/>
+            <a:ext cx="8077200" cy="5262979"/>
           </a:xfrm>
           <a:prstGeom prst="rect">
             <a:avLst/>
@@ -11820,7 +12041,7 @@
               <a:rPr lang="en-US" altLang="en-US" sz="2800" dirty="0">
                 <a:latin typeface="Tahoma" panose="020B0604030504040204" pitchFamily="34" charset="0"/>
               </a:rPr>
-              <a:t>&lt;Integer&gt;();</a:t>
+              <a:t>&lt;&gt;();</a:t>
             </a:r>
             <a:br>
               <a:rPr lang="en-US" altLang="en-US" sz="2800" dirty="0">
@@ -11943,6 +12164,38 @@
                 <a:latin typeface="Tahoma" panose="020B0604030504040204" pitchFamily="34" charset="0"/>
               </a:rPr>
               <a:t>pQueue.remove</a:t>
+            </a:r>
+            <a:r>
+              <a:rPr lang="en-US" altLang="en-US" sz="2800" dirty="0">
+                <a:latin typeface="Tahoma" panose="020B0604030504040204" pitchFamily="34" charset="0"/>
+              </a:rPr>
+              <a:t>());</a:t>
+            </a:r>
+          </a:p>
+          <a:p>
+            <a:pPr>
+              <a:spcBef>
+                <a:spcPct val="0"/>
+              </a:spcBef>
+              <a:buNone/>
+            </a:pPr>
+            <a:r>
+              <a:rPr lang="en-US" altLang="en-US" sz="2800" dirty="0" err="1">
+                <a:latin typeface="Tahoma" panose="020B0604030504040204" pitchFamily="34" charset="0"/>
+              </a:rPr>
+              <a:t>out.println</a:t>
+            </a:r>
+            <a:r>
+              <a:rPr lang="en-US" altLang="en-US" sz="2800" dirty="0">
+                <a:latin typeface="Tahoma" panose="020B0604030504040204" pitchFamily="34" charset="0"/>
+              </a:rPr>
+              <a:t>(</a:t>
+            </a:r>
+            <a:r>
+              <a:rPr lang="en-US" altLang="en-US" sz="2800" dirty="0" err="1">
+                <a:latin typeface="Tahoma" panose="020B0604030504040204" pitchFamily="34" charset="0"/>
+              </a:rPr>
+              <a:t>pQueue.element</a:t>
             </a:r>
             <a:r>
               <a:rPr lang="en-US" altLang="en-US" sz="2800" dirty="0">
@@ -12026,8 +12279,8 @@
         </p:nvSpPr>
         <p:spPr bwMode="auto">
           <a:xfrm>
-            <a:off x="6553200" y="3200400"/>
-            <a:ext cx="2362200" cy="2298700"/>
+            <a:off x="6553200" y="3302001"/>
+            <a:ext cx="2362200" cy="2800767"/>
           </a:xfrm>
           <a:prstGeom prst="rect">
             <a:avLst/>
@@ -12196,7 +12449,7 @@
               <a:buNone/>
             </a:pPr>
             <a:r>
-              <a:rPr lang="en-US" altLang="en-US" u="sng">
+              <a:rPr lang="en-US" altLang="en-US" u="sng" dirty="0">
                 <a:solidFill>
                   <a:srgbClr val="FF0000"/>
                 </a:solidFill>
@@ -12214,29 +12467,40 @@
               <a:buNone/>
             </a:pPr>
             <a:r>
-              <a:rPr lang="en-US" altLang="en-US">
+              <a:rPr lang="en-US" altLang="en-US" dirty="0">
                 <a:latin typeface="Tahoma" panose="020B0604030504040204" pitchFamily="34" charset="0"/>
               </a:rPr>
               <a:t>[7, 11, 10]</a:t>
             </a:r>
             <a:br>
-              <a:rPr lang="en-US" altLang="en-US">
+              <a:rPr lang="en-US" altLang="en-US" dirty="0">
                 <a:latin typeface="Tahoma" panose="020B0604030504040204" pitchFamily="34" charset="0"/>
               </a:rPr>
             </a:br>
             <a:r>
-              <a:rPr lang="en-US" altLang="en-US">
+              <a:rPr lang="en-US" altLang="en-US" dirty="0">
                 <a:latin typeface="Tahoma" panose="020B0604030504040204" pitchFamily="34" charset="0"/>
               </a:rPr>
               <a:t>7</a:t>
             </a:r>
             <a:br>
-              <a:rPr lang="en-US" altLang="en-US">
+              <a:rPr lang="en-US" altLang="en-US" dirty="0">
                 <a:latin typeface="Tahoma" panose="020B0604030504040204" pitchFamily="34" charset="0"/>
               </a:rPr>
             </a:br>
             <a:r>
-              <a:rPr lang="en-US" altLang="en-US">
+              <a:rPr lang="en-US" altLang="en-US" dirty="0">
+                <a:latin typeface="Tahoma" panose="020B0604030504040204" pitchFamily="34" charset="0"/>
+              </a:rPr>
+              <a:t>10</a:t>
+            </a:r>
+            <a:br>
+              <a:rPr lang="en-US" altLang="en-US" dirty="0">
+                <a:latin typeface="Tahoma" panose="020B0604030504040204" pitchFamily="34" charset="0"/>
+              </a:rPr>
+            </a:br>
+            <a:r>
+              <a:rPr lang="en-US" altLang="en-US" dirty="0">
                 <a:latin typeface="Tahoma" panose="020B0604030504040204" pitchFamily="34" charset="0"/>
               </a:rPr>
               <a:t>[10, 11]</a:t>
@@ -12818,10 +13082,28 @@
               <a:buNone/>
             </a:pPr>
             <a:r>
-              <a:rPr lang="en-US" altLang="en-US" sz="2800">
+              <a:rPr lang="en-US" altLang="en-US" sz="2800" dirty="0" err="1">
                 <a:latin typeface="Tahoma" panose="020B0604030504040204" pitchFamily="34" charset="0"/>
               </a:rPr>
-              <a:t>PriorityQueue&lt;Integer&gt; pQueue;</a:t>
+              <a:t>PriorityQueue</a:t>
+            </a:r>
+            <a:r>
+              <a:rPr lang="en-US" altLang="en-US" sz="2800" dirty="0">
+                <a:latin typeface="Tahoma" panose="020B0604030504040204" pitchFamily="34" charset="0"/>
+              </a:rPr>
+              <a:t>&lt;Integer&gt; </a:t>
+            </a:r>
+            <a:r>
+              <a:rPr lang="en-US" altLang="en-US" sz="2800" dirty="0" err="1">
+                <a:latin typeface="Tahoma" panose="020B0604030504040204" pitchFamily="34" charset="0"/>
+              </a:rPr>
+              <a:t>pQueue</a:t>
+            </a:r>
+            <a:r>
+              <a:rPr lang="en-US" altLang="en-US" sz="2800" dirty="0">
+                <a:latin typeface="Tahoma" panose="020B0604030504040204" pitchFamily="34" charset="0"/>
+              </a:rPr>
+              <a:t>;</a:t>
             </a:r>
           </a:p>
           <a:p>
@@ -12833,17 +13115,35 @@
               <a:buNone/>
             </a:pPr>
             <a:r>
-              <a:rPr lang="en-US" altLang="en-US" sz="2800">
+              <a:rPr lang="en-US" altLang="en-US" sz="2800" dirty="0" err="1">
                 <a:latin typeface="Tahoma" panose="020B0604030504040204" pitchFamily="34" charset="0"/>
               </a:rPr>
-              <a:t>pQueue = new PriorityQueue&lt;Integer&gt;();</a:t>
+              <a:t>pQueue</a:t>
+            </a:r>
+            <a:r>
+              <a:rPr lang="en-US" altLang="en-US" sz="2800" dirty="0">
+                <a:latin typeface="Tahoma" panose="020B0604030504040204" pitchFamily="34" charset="0"/>
+              </a:rPr>
+              <a:t> = new </a:t>
+            </a:r>
+            <a:r>
+              <a:rPr lang="en-US" altLang="en-US" sz="2800" dirty="0" err="1">
+                <a:latin typeface="Tahoma" panose="020B0604030504040204" pitchFamily="34" charset="0"/>
+              </a:rPr>
+              <a:t>PriorityQueue</a:t>
+            </a:r>
+            <a:r>
+              <a:rPr lang="en-US" altLang="en-US" sz="2800" dirty="0">
+                <a:latin typeface="Tahoma" panose="020B0604030504040204" pitchFamily="34" charset="0"/>
+              </a:rPr>
+              <a:t>&lt;&gt;();</a:t>
             </a:r>
             <a:br>
-              <a:rPr lang="en-US" altLang="en-US" sz="2800">
+              <a:rPr lang="en-US" altLang="en-US" sz="2800" dirty="0">
                 <a:latin typeface="Tahoma" panose="020B0604030504040204" pitchFamily="34" charset="0"/>
               </a:rPr>
             </a:br>
-            <a:endParaRPr lang="en-US" altLang="en-US" sz="2800">
+            <a:endParaRPr lang="en-US" altLang="en-US" sz="2800" dirty="0">
               <a:latin typeface="Tahoma" panose="020B0604030504040204" pitchFamily="34" charset="0"/>
             </a:endParaRPr>
           </a:p>
@@ -12856,10 +13156,16 @@
               <a:buNone/>
             </a:pPr>
             <a:r>
-              <a:rPr lang="en-US" altLang="en-US" sz="2800">
+              <a:rPr lang="en-US" altLang="en-US" sz="2800" dirty="0" err="1">
                 <a:latin typeface="Tahoma" panose="020B0604030504040204" pitchFamily="34" charset="0"/>
               </a:rPr>
-              <a:t>pQueue.add(11);</a:t>
+              <a:t>pQueue.add</a:t>
+            </a:r>
+            <a:r>
+              <a:rPr lang="en-US" altLang="en-US" sz="2800" dirty="0">
+                <a:latin typeface="Tahoma" panose="020B0604030504040204" pitchFamily="34" charset="0"/>
+              </a:rPr>
+              <a:t>(11);</a:t>
             </a:r>
           </a:p>
           <a:p>
@@ -12871,10 +13177,16 @@
               <a:buNone/>
             </a:pPr>
             <a:r>
-              <a:rPr lang="en-US" altLang="en-US" sz="2800">
+              <a:rPr lang="en-US" altLang="en-US" sz="2800" dirty="0" err="1">
                 <a:latin typeface="Tahoma" panose="020B0604030504040204" pitchFamily="34" charset="0"/>
               </a:rPr>
-              <a:t>pQueue.add(10);</a:t>
+              <a:t>pQueue.add</a:t>
+            </a:r>
+            <a:r>
+              <a:rPr lang="en-US" altLang="en-US" sz="2800" dirty="0">
+                <a:latin typeface="Tahoma" panose="020B0604030504040204" pitchFamily="34" charset="0"/>
+              </a:rPr>
+              <a:t>(10);</a:t>
             </a:r>
           </a:p>
           <a:p>
@@ -12886,10 +13198,16 @@
               <a:buNone/>
             </a:pPr>
             <a:r>
-              <a:rPr lang="en-US" altLang="en-US" sz="2800">
+              <a:rPr lang="en-US" altLang="en-US" sz="2800" dirty="0" err="1">
                 <a:latin typeface="Tahoma" panose="020B0604030504040204" pitchFamily="34" charset="0"/>
               </a:rPr>
-              <a:t>pQueue.add(7);</a:t>
+              <a:t>pQueue.add</a:t>
+            </a:r>
+            <a:r>
+              <a:rPr lang="en-US" altLang="en-US" sz="2800" dirty="0">
+                <a:latin typeface="Tahoma" panose="020B0604030504040204" pitchFamily="34" charset="0"/>
+              </a:rPr>
+              <a:t>(7);</a:t>
             </a:r>
           </a:p>
           <a:p>
@@ -12900,7 +13218,7 @@
               <a:buFontTx/>
               <a:buNone/>
             </a:pPr>
-            <a:endParaRPr lang="en-US" altLang="en-US" sz="2800">
+            <a:endParaRPr lang="en-US" altLang="en-US" sz="2800" dirty="0">
               <a:latin typeface="Tahoma" panose="020B0604030504040204" pitchFamily="34" charset="0"/>
             </a:endParaRPr>
           </a:p>
@@ -12913,10 +13231,22 @@
               <a:buNone/>
             </a:pPr>
             <a:r>
-              <a:rPr lang="en-US" altLang="en-US" sz="2800">
+              <a:rPr lang="en-US" altLang="en-US" sz="2800" dirty="0">
                 <a:latin typeface="Tahoma" panose="020B0604030504040204" pitchFamily="34" charset="0"/>
               </a:rPr>
-              <a:t>while(!pQueue.isEmpty())</a:t>
+              <a:t>while(!</a:t>
+            </a:r>
+            <a:r>
+              <a:rPr lang="en-US" altLang="en-US" sz="2800" dirty="0" err="1">
+                <a:latin typeface="Tahoma" panose="020B0604030504040204" pitchFamily="34" charset="0"/>
+              </a:rPr>
+              <a:t>pQueue.isEmpty</a:t>
+            </a:r>
+            <a:r>
+              <a:rPr lang="en-US" altLang="en-US" sz="2800" dirty="0">
+                <a:latin typeface="Tahoma" panose="020B0604030504040204" pitchFamily="34" charset="0"/>
+              </a:rPr>
+              <a:t>())</a:t>
             </a:r>
           </a:p>
           <a:p>
@@ -12928,7 +13258,7 @@
               <a:buNone/>
             </a:pPr>
             <a:r>
-              <a:rPr lang="en-US" altLang="en-US" sz="2800">
+              <a:rPr lang="en-US" altLang="en-US" sz="2800" dirty="0">
                 <a:latin typeface="Tahoma" panose="020B0604030504040204" pitchFamily="34" charset="0"/>
               </a:rPr>
               <a:t>{</a:t>
@@ -12943,10 +13273,34 @@
               <a:buNone/>
             </a:pPr>
             <a:r>
-              <a:rPr lang="en-US" altLang="en-US" sz="2800">
+              <a:rPr lang="en-US" altLang="en-US" sz="2800" dirty="0">
                 <a:latin typeface="Tahoma" panose="020B0604030504040204" pitchFamily="34" charset="0"/>
               </a:rPr>
-              <a:t>   out.println(pQueue.remove());</a:t>
+              <a:t>   </a:t>
+            </a:r>
+            <a:r>
+              <a:rPr lang="en-US" altLang="en-US" sz="2800" dirty="0" err="1">
+                <a:latin typeface="Tahoma" panose="020B0604030504040204" pitchFamily="34" charset="0"/>
+              </a:rPr>
+              <a:t>out.println</a:t>
+            </a:r>
+            <a:r>
+              <a:rPr lang="en-US" altLang="en-US" sz="2800" dirty="0">
+                <a:latin typeface="Tahoma" panose="020B0604030504040204" pitchFamily="34" charset="0"/>
+              </a:rPr>
+              <a:t>(</a:t>
+            </a:r>
+            <a:r>
+              <a:rPr lang="en-US" altLang="en-US" sz="2800" dirty="0" err="1">
+                <a:latin typeface="Tahoma" panose="020B0604030504040204" pitchFamily="34" charset="0"/>
+              </a:rPr>
+              <a:t>pQueue.remove</a:t>
+            </a:r>
+            <a:r>
+              <a:rPr lang="en-US" altLang="en-US" sz="2800" dirty="0">
+                <a:latin typeface="Tahoma" panose="020B0604030504040204" pitchFamily="34" charset="0"/>
+              </a:rPr>
+              <a:t>());</a:t>
             </a:r>
           </a:p>
           <a:p>
@@ -12958,7 +13312,7 @@
               <a:buNone/>
             </a:pPr>
             <a:r>
-              <a:rPr lang="en-US" altLang="en-US" sz="2800">
+              <a:rPr lang="en-US" altLang="en-US" sz="2800" dirty="0">
                 <a:latin typeface="Tahoma" panose="020B0604030504040204" pitchFamily="34" charset="0"/>
               </a:rPr>
               <a:t>}</a:t>
@@ -12972,7 +13326,7 @@
               <a:buFontTx/>
               <a:buNone/>
             </a:pPr>
-            <a:endParaRPr lang="en-US" altLang="en-US" sz="2800">
+            <a:endParaRPr lang="en-US" altLang="en-US" sz="2800" dirty="0">
               <a:latin typeface="Tahoma" panose="020B0604030504040204" pitchFamily="34" charset="0"/>
             </a:endParaRPr>
           </a:p>
@@ -13976,6 +14330,3147 @@
 </p:sld>
 </file>
 
+<file path=ppt/slides/slide18.xml><?xml version="1.0" encoding="utf-8"?>
+<p:sld xmlns:a="http://schemas.openxmlformats.org/drawingml/2006/main" xmlns:r="http://schemas.openxmlformats.org/officeDocument/2006/relationships" xmlns:p="http://schemas.openxmlformats.org/presentationml/2006/main">
+  <p:cSld>
+    <p:spTree>
+      <p:nvGrpSpPr>
+        <p:cNvPr id="1" name="">
+          <a:extLst>
+            <a:ext uri="{FF2B5EF4-FFF2-40B4-BE49-F238E27FC236}">
+              <a16:creationId xmlns:a16="http://schemas.microsoft.com/office/drawing/2014/main" id="{F12CE510-6A42-741D-C1FA-BC3050686D15}"/>
+            </a:ext>
+          </a:extLst>
+        </p:cNvPr>
+        <p:cNvGrpSpPr/>
+        <p:nvPr/>
+      </p:nvGrpSpPr>
+      <p:grpSpPr>
+        <a:xfrm>
+          <a:off x="0" y="0"/>
+          <a:ext cx="0" cy="0"/>
+          <a:chOff x="0" y="0"/>
+          <a:chExt cx="0" cy="0"/>
+        </a:xfrm>
+      </p:grpSpPr>
+      <p:sp>
+        <p:nvSpPr>
+          <p:cNvPr id="12" name="WordArt 3">
+            <a:extLst>
+              <a:ext uri="{FF2B5EF4-FFF2-40B4-BE49-F238E27FC236}">
+                <a16:creationId xmlns:a16="http://schemas.microsoft.com/office/drawing/2014/main" id="{9AE95D73-A6E6-E2F0-70C4-8330270D18F3}"/>
+              </a:ext>
+            </a:extLst>
+          </p:cNvPr>
+          <p:cNvSpPr>
+            <a:spLocks noGrp="1" noChangeArrowheads="1" noChangeShapeType="1" noTextEdit="1"/>
+          </p:cNvSpPr>
+          <p:nvPr>
+            <p:ph type="title" idx="4294967295"/>
+          </p:nvPr>
+        </p:nvSpPr>
+        <p:spPr bwMode="auto">
+          <a:xfrm>
+            <a:off x="1219200" y="381000"/>
+            <a:ext cx="6477000" cy="914400"/>
+          </a:xfrm>
+          <a:prstGeom prst="rect">
+            <a:avLst/>
+          </a:prstGeom>
+          <a:noFill/>
+          <a:ln>
+            <a:noFill/>
+            <a:prstDash/>
+          </a:ln>
+          <a:effectLst/>
+        </p:spPr>
+        <p:txBody>
+          <a:bodyPr rot="0" spcFirstLastPara="0" vertOverflow="overflow" horzOverflow="overflow" vert="horz" wrap="none" lIns="91440" tIns="45720" rIns="91440" bIns="45720" numCol="1" spcCol="0" rtlCol="0" fromWordArt="1" anchor="t" anchorCtr="0" forceAA="0" compatLnSpc="1">
+            <a:prstTxWarp prst="textPlain">
+              <a:avLst>
+                <a:gd name="adj" fmla="val 50000"/>
+              </a:avLst>
+            </a:prstTxWarp>
+            <a:noAutofit/>
+          </a:bodyPr>
+          <a:lstStyle/>
+          <a:p>
+            <a:pPr marL="0" marR="0" lvl="0" indent="0" algn="ctr" defTabSz="914400" rtl="0" eaLnBrk="0" fontAlgn="base" latinLnBrk="0" hangingPunct="0">
+              <a:lnSpc>
+                <a:spcPct val="100000"/>
+              </a:lnSpc>
+              <a:spcBef>
+                <a:spcPct val="0"/>
+              </a:spcBef>
+              <a:spcAft>
+                <a:spcPct val="0"/>
+              </a:spcAft>
+              <a:buClrTx/>
+              <a:buSzTx/>
+              <a:buFontTx/>
+              <a:buNone/>
+              <a:tabLst/>
+              <a:defRPr/>
+            </a:pPr>
+            <a:r>
+              <a:rPr kumimoji="0" lang="en-US" sz="3600" b="1" i="0" u="none" strike="noStrike" kern="10" cap="none" spc="0" normalizeH="0" baseline="0" noProof="0" dirty="0">
+                <a:ln w="12700">
+                  <a:solidFill>
+                    <a:srgbClr val="EAEAEA"/>
+                  </a:solidFill>
+                  <a:round/>
+                  <a:headEnd/>
+                  <a:tailEnd/>
+                </a:ln>
+                <a:gradFill rotWithShape="1">
+                  <a:gsLst>
+                    <a:gs pos="0">
+                      <a:srgbClr val="A603AB"/>
+                    </a:gs>
+                    <a:gs pos="12000">
+                      <a:srgbClr val="E81766"/>
+                    </a:gs>
+                    <a:gs pos="27000">
+                      <a:srgbClr val="EE3F17"/>
+                    </a:gs>
+                    <a:gs pos="48000">
+                      <a:srgbClr val="FFFF00"/>
+                    </a:gs>
+                    <a:gs pos="64999">
+                      <a:srgbClr val="1A8D48"/>
+                    </a:gs>
+                    <a:gs pos="78999">
+                      <a:srgbClr val="0819FB"/>
+                    </a:gs>
+                    <a:gs pos="100000">
+                      <a:srgbClr val="A603AB"/>
+                    </a:gs>
+                  </a:gsLst>
+                  <a:lin ang="0" scaled="1"/>
+                </a:gradFill>
+                <a:effectLst>
+                  <a:outerShdw dist="35921" dir="2700000" sy="50000" kx="2115830" algn="bl" rotWithShape="0">
+                    <a:srgbClr val="C0C0C0">
+                      <a:alpha val="79999"/>
+                    </a:srgbClr>
+                  </a:outerShdw>
+                </a:effectLst>
+                <a:uLnTx/>
+                <a:uFillTx/>
+                <a:latin typeface="Arial Black" panose="020B0A04020102020204" pitchFamily="34" charset="0"/>
+                <a:ea typeface="+mn-ea"/>
+                <a:cs typeface="+mn-cs"/>
+              </a:rPr>
+              <a:t>add</a:t>
+            </a:r>
+          </a:p>
+        </p:txBody>
+      </p:sp>
+      <p:sp>
+        <p:nvSpPr>
+          <p:cNvPr id="11" name="Text Box 2">
+            <a:extLst>
+              <a:ext uri="{FF2B5EF4-FFF2-40B4-BE49-F238E27FC236}">
+                <a16:creationId xmlns:a16="http://schemas.microsoft.com/office/drawing/2014/main" id="{3F98DBB2-FC30-FAEA-0D75-9C7438395BA4}"/>
+              </a:ext>
+            </a:extLst>
+          </p:cNvPr>
+          <p:cNvSpPr txBox="1">
+            <a:spLocks noChangeArrowheads="1"/>
+          </p:cNvSpPr>
+          <p:nvPr/>
+        </p:nvSpPr>
+        <p:spPr bwMode="auto">
+          <a:xfrm>
+            <a:off x="609600" y="1600200"/>
+            <a:ext cx="8153400" cy="3935413"/>
+          </a:xfrm>
+          <a:prstGeom prst="rect">
+            <a:avLst/>
+          </a:prstGeom>
+          <a:noFill/>
+          <a:ln>
+            <a:noFill/>
+          </a:ln>
+          <a:effectLst/>
+          <a:extLst>
+            <a:ext uri="{909E8E84-426E-40DD-AFC4-6F175D3DCCD1}">
+              <a14:hiddenFill xmlns:a14="http://schemas.microsoft.com/office/drawing/2010/main">
+                <a:solidFill>
+                  <a:schemeClr val="accent1"/>
+                </a:solidFill>
+              </a14:hiddenFill>
+            </a:ext>
+            <a:ext uri="{91240B29-F687-4F45-9708-019B960494DF}">
+              <a14:hiddenLine xmlns:a14="http://schemas.microsoft.com/office/drawing/2010/main" w="9525">
+                <a:solidFill>
+                  <a:schemeClr val="tx1"/>
+                </a:solidFill>
+                <a:miter lim="800000"/>
+                <a:headEnd/>
+                <a:tailEnd/>
+              </a14:hiddenLine>
+            </a:ext>
+            <a:ext uri="{AF507438-7753-43E0-B8FC-AC1667EBCBE1}">
+              <a14:hiddenEffects xmlns:a14="http://schemas.microsoft.com/office/drawing/2010/main">
+                <a:effectLst>
+                  <a:outerShdw dist="35921" dir="2700000" algn="ctr" rotWithShape="0">
+                    <a:schemeClr val="bg2"/>
+                  </a:outerShdw>
+                </a:effectLst>
+              </a14:hiddenEffects>
+            </a:ext>
+          </a:extLst>
+        </p:spPr>
+        <p:txBody>
+          <a:bodyPr>
+            <a:spAutoFit/>
+          </a:bodyPr>
+          <a:lstStyle>
+            <a:lvl1pPr>
+              <a:spcBef>
+                <a:spcPct val="20000"/>
+              </a:spcBef>
+              <a:buChar char="•"/>
+              <a:defRPr sz="3200">
+                <a:solidFill>
+                  <a:schemeClr val="tx1"/>
+                </a:solidFill>
+                <a:latin typeface="Times New Roman" panose="02020603050405020304" pitchFamily="18" charset="0"/>
+              </a:defRPr>
+            </a:lvl1pPr>
+            <a:lvl2pPr marL="742950" indent="-285750">
+              <a:spcBef>
+                <a:spcPct val="20000"/>
+              </a:spcBef>
+              <a:buChar char="–"/>
+              <a:defRPr sz="2800">
+                <a:solidFill>
+                  <a:schemeClr val="tx1"/>
+                </a:solidFill>
+                <a:latin typeface="Times New Roman" panose="02020603050405020304" pitchFamily="18" charset="0"/>
+              </a:defRPr>
+            </a:lvl2pPr>
+            <a:lvl3pPr marL="1143000" indent="-228600">
+              <a:spcBef>
+                <a:spcPct val="20000"/>
+              </a:spcBef>
+              <a:buChar char="•"/>
+              <a:defRPr sz="2400">
+                <a:solidFill>
+                  <a:schemeClr val="tx1"/>
+                </a:solidFill>
+                <a:latin typeface="Times New Roman" panose="02020603050405020304" pitchFamily="18" charset="0"/>
+              </a:defRPr>
+            </a:lvl3pPr>
+            <a:lvl4pPr marL="1600200" indent="-228600">
+              <a:spcBef>
+                <a:spcPct val="20000"/>
+              </a:spcBef>
+              <a:buChar char="–"/>
+              <a:defRPr sz="2000">
+                <a:solidFill>
+                  <a:schemeClr val="tx1"/>
+                </a:solidFill>
+                <a:latin typeface="Times New Roman" panose="02020603050405020304" pitchFamily="18" charset="0"/>
+              </a:defRPr>
+            </a:lvl4pPr>
+            <a:lvl5pPr marL="2057400" indent="-228600">
+              <a:spcBef>
+                <a:spcPct val="20000"/>
+              </a:spcBef>
+              <a:buChar char="»"/>
+              <a:defRPr sz="2000">
+                <a:solidFill>
+                  <a:schemeClr val="tx1"/>
+                </a:solidFill>
+                <a:latin typeface="Times New Roman" panose="02020603050405020304" pitchFamily="18" charset="0"/>
+              </a:defRPr>
+            </a:lvl5pPr>
+            <a:lvl6pPr marL="2514600" indent="-228600" eaLnBrk="0" fontAlgn="base" hangingPunct="0">
+              <a:spcBef>
+                <a:spcPct val="20000"/>
+              </a:spcBef>
+              <a:spcAft>
+                <a:spcPct val="0"/>
+              </a:spcAft>
+              <a:buChar char="»"/>
+              <a:defRPr sz="2000">
+                <a:solidFill>
+                  <a:schemeClr val="tx1"/>
+                </a:solidFill>
+                <a:latin typeface="Times New Roman" panose="02020603050405020304" pitchFamily="18" charset="0"/>
+              </a:defRPr>
+            </a:lvl6pPr>
+            <a:lvl7pPr marL="2971800" indent="-228600" eaLnBrk="0" fontAlgn="base" hangingPunct="0">
+              <a:spcBef>
+                <a:spcPct val="20000"/>
+              </a:spcBef>
+              <a:spcAft>
+                <a:spcPct val="0"/>
+              </a:spcAft>
+              <a:buChar char="»"/>
+              <a:defRPr sz="2000">
+                <a:solidFill>
+                  <a:schemeClr val="tx1"/>
+                </a:solidFill>
+                <a:latin typeface="Times New Roman" panose="02020603050405020304" pitchFamily="18" charset="0"/>
+              </a:defRPr>
+            </a:lvl7pPr>
+            <a:lvl8pPr marL="3429000" indent="-228600" eaLnBrk="0" fontAlgn="base" hangingPunct="0">
+              <a:spcBef>
+                <a:spcPct val="20000"/>
+              </a:spcBef>
+              <a:spcAft>
+                <a:spcPct val="0"/>
+              </a:spcAft>
+              <a:buChar char="»"/>
+              <a:defRPr sz="2000">
+                <a:solidFill>
+                  <a:schemeClr val="tx1"/>
+                </a:solidFill>
+                <a:latin typeface="Times New Roman" panose="02020603050405020304" pitchFamily="18" charset="0"/>
+              </a:defRPr>
+            </a:lvl8pPr>
+            <a:lvl9pPr marL="3886200" indent="-228600" eaLnBrk="0" fontAlgn="base" hangingPunct="0">
+              <a:spcBef>
+                <a:spcPct val="20000"/>
+              </a:spcBef>
+              <a:spcAft>
+                <a:spcPct val="0"/>
+              </a:spcAft>
+              <a:buChar char="»"/>
+              <a:defRPr sz="2000">
+                <a:solidFill>
+                  <a:schemeClr val="tx1"/>
+                </a:solidFill>
+                <a:latin typeface="Times New Roman" panose="02020603050405020304" pitchFamily="18" charset="0"/>
+              </a:defRPr>
+            </a:lvl9pPr>
+          </a:lstStyle>
+          <a:p>
+            <a:pPr>
+              <a:spcBef>
+                <a:spcPct val="0"/>
+              </a:spcBef>
+              <a:buFontTx/>
+              <a:buNone/>
+            </a:pPr>
+            <a:r>
+              <a:rPr lang="en-US" altLang="en-US" sz="2800" dirty="0" err="1">
+                <a:latin typeface="Tahoma" panose="020B0604030504040204" pitchFamily="34" charset="0"/>
+              </a:rPr>
+              <a:t>PriorityQueue</a:t>
+            </a:r>
+            <a:r>
+              <a:rPr lang="en-US" altLang="en-US" sz="2800" dirty="0">
+                <a:latin typeface="Tahoma" panose="020B0604030504040204" pitchFamily="34" charset="0"/>
+              </a:rPr>
+              <a:t>&lt;Integer&gt; </a:t>
+            </a:r>
+            <a:r>
+              <a:rPr lang="en-US" altLang="en-US" sz="2800" dirty="0" err="1">
+                <a:latin typeface="Tahoma" panose="020B0604030504040204" pitchFamily="34" charset="0"/>
+              </a:rPr>
+              <a:t>pQueue</a:t>
+            </a:r>
+            <a:r>
+              <a:rPr lang="en-US" altLang="en-US" sz="2800" dirty="0">
+                <a:latin typeface="Tahoma" panose="020B0604030504040204" pitchFamily="34" charset="0"/>
+              </a:rPr>
+              <a:t>;</a:t>
+            </a:r>
+          </a:p>
+          <a:p>
+            <a:pPr>
+              <a:spcBef>
+                <a:spcPct val="0"/>
+              </a:spcBef>
+              <a:buFontTx/>
+              <a:buNone/>
+            </a:pPr>
+            <a:r>
+              <a:rPr lang="en-US" altLang="en-US" sz="2800" dirty="0" err="1">
+                <a:latin typeface="Tahoma" panose="020B0604030504040204" pitchFamily="34" charset="0"/>
+              </a:rPr>
+              <a:t>pQueue</a:t>
+            </a:r>
+            <a:r>
+              <a:rPr lang="en-US" altLang="en-US" sz="2800" dirty="0">
+                <a:latin typeface="Tahoma" panose="020B0604030504040204" pitchFamily="34" charset="0"/>
+              </a:rPr>
+              <a:t> = new </a:t>
+            </a:r>
+            <a:r>
+              <a:rPr lang="en-US" altLang="en-US" sz="2800" dirty="0" err="1">
+                <a:latin typeface="Tahoma" panose="020B0604030504040204" pitchFamily="34" charset="0"/>
+              </a:rPr>
+              <a:t>PriorityQueue</a:t>
+            </a:r>
+            <a:r>
+              <a:rPr lang="en-US" altLang="en-US" sz="2800" dirty="0">
+                <a:latin typeface="Tahoma" panose="020B0604030504040204" pitchFamily="34" charset="0"/>
+              </a:rPr>
+              <a:t>&lt;&gt;();</a:t>
+            </a:r>
+            <a:br>
+              <a:rPr lang="en-US" altLang="en-US" sz="2800" dirty="0">
+                <a:latin typeface="Tahoma" panose="020B0604030504040204" pitchFamily="34" charset="0"/>
+              </a:rPr>
+            </a:br>
+            <a:endParaRPr lang="en-US" altLang="en-US" sz="2800" dirty="0">
+              <a:latin typeface="Tahoma" panose="020B0604030504040204" pitchFamily="34" charset="0"/>
+            </a:endParaRPr>
+          </a:p>
+          <a:p>
+            <a:pPr>
+              <a:spcBef>
+                <a:spcPct val="0"/>
+              </a:spcBef>
+              <a:buFontTx/>
+              <a:buNone/>
+            </a:pPr>
+            <a:r>
+              <a:rPr lang="en-US" altLang="en-US" sz="2800" dirty="0" err="1">
+                <a:latin typeface="Tahoma" panose="020B0604030504040204" pitchFamily="34" charset="0"/>
+              </a:rPr>
+              <a:t>pQueue.offer</a:t>
+            </a:r>
+            <a:r>
+              <a:rPr lang="en-US" altLang="en-US" sz="2800" dirty="0">
+                <a:latin typeface="Tahoma" panose="020B0604030504040204" pitchFamily="34" charset="0"/>
+              </a:rPr>
+              <a:t>(11);</a:t>
+            </a:r>
+          </a:p>
+          <a:p>
+            <a:pPr>
+              <a:spcBef>
+                <a:spcPct val="0"/>
+              </a:spcBef>
+              <a:buFontTx/>
+              <a:buNone/>
+            </a:pPr>
+            <a:r>
+              <a:rPr lang="en-US" altLang="en-US" sz="2800" dirty="0" err="1">
+                <a:latin typeface="Tahoma" panose="020B0604030504040204" pitchFamily="34" charset="0"/>
+              </a:rPr>
+              <a:t>pQueue.offer</a:t>
+            </a:r>
+            <a:r>
+              <a:rPr lang="en-US" altLang="en-US" sz="2800" dirty="0">
+                <a:latin typeface="Tahoma" panose="020B0604030504040204" pitchFamily="34" charset="0"/>
+              </a:rPr>
+              <a:t>(10);</a:t>
+            </a:r>
+          </a:p>
+          <a:p>
+            <a:pPr>
+              <a:spcBef>
+                <a:spcPct val="0"/>
+              </a:spcBef>
+              <a:buFontTx/>
+              <a:buNone/>
+            </a:pPr>
+            <a:r>
+              <a:rPr lang="en-US" altLang="en-US" sz="2800" dirty="0" err="1">
+                <a:latin typeface="Tahoma" panose="020B0604030504040204" pitchFamily="34" charset="0"/>
+              </a:rPr>
+              <a:t>pQueue.offer</a:t>
+            </a:r>
+            <a:r>
+              <a:rPr lang="en-US" altLang="en-US" sz="2800" dirty="0">
+                <a:latin typeface="Tahoma" panose="020B0604030504040204" pitchFamily="34" charset="0"/>
+              </a:rPr>
+              <a:t>(7);</a:t>
+            </a:r>
+          </a:p>
+          <a:p>
+            <a:pPr>
+              <a:spcBef>
+                <a:spcPct val="0"/>
+              </a:spcBef>
+              <a:buFontTx/>
+              <a:buNone/>
+            </a:pPr>
+            <a:r>
+              <a:rPr lang="en-US" altLang="en-US" sz="2800" dirty="0" err="1">
+                <a:latin typeface="Tahoma" panose="020B0604030504040204" pitchFamily="34" charset="0"/>
+              </a:rPr>
+              <a:t>out.println</a:t>
+            </a:r>
+            <a:r>
+              <a:rPr lang="en-US" altLang="en-US" sz="2800" dirty="0">
+                <a:latin typeface="Tahoma" panose="020B0604030504040204" pitchFamily="34" charset="0"/>
+              </a:rPr>
+              <a:t>(</a:t>
+            </a:r>
+            <a:r>
+              <a:rPr lang="en-US" altLang="en-US" sz="2800" dirty="0" err="1">
+                <a:latin typeface="Tahoma" panose="020B0604030504040204" pitchFamily="34" charset="0"/>
+              </a:rPr>
+              <a:t>pQueue</a:t>
+            </a:r>
+            <a:r>
+              <a:rPr lang="en-US" altLang="en-US" sz="2800" dirty="0">
+                <a:latin typeface="Tahoma" panose="020B0604030504040204" pitchFamily="34" charset="0"/>
+              </a:rPr>
+              <a:t>);</a:t>
+            </a:r>
+          </a:p>
+          <a:p>
+            <a:pPr>
+              <a:spcBef>
+                <a:spcPct val="0"/>
+              </a:spcBef>
+              <a:buFontTx/>
+              <a:buNone/>
+            </a:pPr>
+            <a:endParaRPr lang="en-US" altLang="en-US" sz="2800" dirty="0">
+              <a:latin typeface="Tahoma" panose="020B0604030504040204" pitchFamily="34" charset="0"/>
+            </a:endParaRPr>
+          </a:p>
+          <a:p>
+            <a:pPr>
+              <a:spcBef>
+                <a:spcPct val="0"/>
+              </a:spcBef>
+              <a:buFontTx/>
+              <a:buNone/>
+            </a:pPr>
+            <a:endParaRPr lang="en-US" altLang="en-US" sz="2800" dirty="0">
+              <a:latin typeface="Tahoma" panose="020B0604030504040204" pitchFamily="34" charset="0"/>
+            </a:endParaRPr>
+          </a:p>
+        </p:txBody>
+      </p:sp>
+      <p:sp>
+        <p:nvSpPr>
+          <p:cNvPr id="13" name="Text Box 4">
+            <a:extLst>
+              <a:ext uri="{FF2B5EF4-FFF2-40B4-BE49-F238E27FC236}">
+                <a16:creationId xmlns:a16="http://schemas.microsoft.com/office/drawing/2014/main" id="{2F9BE685-F840-42CE-DE23-D461198E6AAC}"/>
+              </a:ext>
+            </a:extLst>
+          </p:cNvPr>
+          <p:cNvSpPr txBox="1">
+            <a:spLocks noChangeArrowheads="1"/>
+          </p:cNvSpPr>
+          <p:nvPr/>
+        </p:nvSpPr>
+        <p:spPr bwMode="auto">
+          <a:xfrm>
+            <a:off x="6553200" y="3200400"/>
+            <a:ext cx="2362200" cy="1323975"/>
+          </a:xfrm>
+          <a:prstGeom prst="rect">
+            <a:avLst/>
+          </a:prstGeom>
+          <a:noFill/>
+          <a:ln w="12700">
+            <a:solidFill>
+              <a:srgbClr val="993300"/>
+            </a:solidFill>
+            <a:miter lim="800000"/>
+            <a:headEnd type="none" w="sm" len="sm"/>
+            <a:tailEnd type="none" w="sm" len="sm"/>
+          </a:ln>
+          <a:effectLst/>
+          <a:extLst>
+            <a:ext uri="{909E8E84-426E-40DD-AFC4-6F175D3DCCD1}">
+              <a14:hiddenFill xmlns:a14="http://schemas.microsoft.com/office/drawing/2010/main">
+                <a:solidFill>
+                  <a:schemeClr val="accent1"/>
+                </a:solidFill>
+              </a14:hiddenFill>
+            </a:ext>
+            <a:ext uri="{AF507438-7753-43E0-B8FC-AC1667EBCBE1}">
+              <a14:hiddenEffects xmlns:a14="http://schemas.microsoft.com/office/drawing/2010/main">
+                <a:effectLst>
+                  <a:outerShdw dist="35921" dir="2700000" algn="ctr" rotWithShape="0">
+                    <a:schemeClr val="bg2"/>
+                  </a:outerShdw>
+                </a:effectLst>
+              </a14:hiddenEffects>
+            </a:ext>
+          </a:extLst>
+        </p:spPr>
+        <p:txBody>
+          <a:bodyPr>
+            <a:spAutoFit/>
+          </a:bodyPr>
+          <a:lstStyle>
+            <a:lvl1pPr>
+              <a:spcBef>
+                <a:spcPct val="20000"/>
+              </a:spcBef>
+              <a:buChar char="•"/>
+              <a:defRPr sz="3200">
+                <a:solidFill>
+                  <a:schemeClr val="tx1"/>
+                </a:solidFill>
+                <a:latin typeface="Times New Roman" panose="02020603050405020304" pitchFamily="18" charset="0"/>
+              </a:defRPr>
+            </a:lvl1pPr>
+            <a:lvl2pPr marL="742950" indent="-285750">
+              <a:spcBef>
+                <a:spcPct val="20000"/>
+              </a:spcBef>
+              <a:buChar char="–"/>
+              <a:defRPr sz="2800">
+                <a:solidFill>
+                  <a:schemeClr val="tx1"/>
+                </a:solidFill>
+                <a:latin typeface="Times New Roman" panose="02020603050405020304" pitchFamily="18" charset="0"/>
+              </a:defRPr>
+            </a:lvl2pPr>
+            <a:lvl3pPr marL="1143000" indent="-228600">
+              <a:spcBef>
+                <a:spcPct val="20000"/>
+              </a:spcBef>
+              <a:buChar char="•"/>
+              <a:defRPr sz="2400">
+                <a:solidFill>
+                  <a:schemeClr val="tx1"/>
+                </a:solidFill>
+                <a:latin typeface="Times New Roman" panose="02020603050405020304" pitchFamily="18" charset="0"/>
+              </a:defRPr>
+            </a:lvl3pPr>
+            <a:lvl4pPr marL="1600200" indent="-228600">
+              <a:spcBef>
+                <a:spcPct val="20000"/>
+              </a:spcBef>
+              <a:buChar char="–"/>
+              <a:defRPr sz="2000">
+                <a:solidFill>
+                  <a:schemeClr val="tx1"/>
+                </a:solidFill>
+                <a:latin typeface="Times New Roman" panose="02020603050405020304" pitchFamily="18" charset="0"/>
+              </a:defRPr>
+            </a:lvl4pPr>
+            <a:lvl5pPr marL="2057400" indent="-228600">
+              <a:spcBef>
+                <a:spcPct val="20000"/>
+              </a:spcBef>
+              <a:buChar char="»"/>
+              <a:defRPr sz="2000">
+                <a:solidFill>
+                  <a:schemeClr val="tx1"/>
+                </a:solidFill>
+                <a:latin typeface="Times New Roman" panose="02020603050405020304" pitchFamily="18" charset="0"/>
+              </a:defRPr>
+            </a:lvl5pPr>
+            <a:lvl6pPr marL="2514600" indent="-228600" eaLnBrk="0" fontAlgn="base" hangingPunct="0">
+              <a:spcBef>
+                <a:spcPct val="20000"/>
+              </a:spcBef>
+              <a:spcAft>
+                <a:spcPct val="0"/>
+              </a:spcAft>
+              <a:buChar char="»"/>
+              <a:defRPr sz="2000">
+                <a:solidFill>
+                  <a:schemeClr val="tx1"/>
+                </a:solidFill>
+                <a:latin typeface="Times New Roman" panose="02020603050405020304" pitchFamily="18" charset="0"/>
+              </a:defRPr>
+            </a:lvl6pPr>
+            <a:lvl7pPr marL="2971800" indent="-228600" eaLnBrk="0" fontAlgn="base" hangingPunct="0">
+              <a:spcBef>
+                <a:spcPct val="20000"/>
+              </a:spcBef>
+              <a:spcAft>
+                <a:spcPct val="0"/>
+              </a:spcAft>
+              <a:buChar char="»"/>
+              <a:defRPr sz="2000">
+                <a:solidFill>
+                  <a:schemeClr val="tx1"/>
+                </a:solidFill>
+                <a:latin typeface="Times New Roman" panose="02020603050405020304" pitchFamily="18" charset="0"/>
+              </a:defRPr>
+            </a:lvl7pPr>
+            <a:lvl8pPr marL="3429000" indent="-228600" eaLnBrk="0" fontAlgn="base" hangingPunct="0">
+              <a:spcBef>
+                <a:spcPct val="20000"/>
+              </a:spcBef>
+              <a:spcAft>
+                <a:spcPct val="0"/>
+              </a:spcAft>
+              <a:buChar char="»"/>
+              <a:defRPr sz="2000">
+                <a:solidFill>
+                  <a:schemeClr val="tx1"/>
+                </a:solidFill>
+                <a:latin typeface="Times New Roman" panose="02020603050405020304" pitchFamily="18" charset="0"/>
+              </a:defRPr>
+            </a:lvl8pPr>
+            <a:lvl9pPr marL="3886200" indent="-228600" eaLnBrk="0" fontAlgn="base" hangingPunct="0">
+              <a:spcBef>
+                <a:spcPct val="20000"/>
+              </a:spcBef>
+              <a:spcAft>
+                <a:spcPct val="0"/>
+              </a:spcAft>
+              <a:buChar char="»"/>
+              <a:defRPr sz="2000">
+                <a:solidFill>
+                  <a:schemeClr val="tx1"/>
+                </a:solidFill>
+                <a:latin typeface="Times New Roman" panose="02020603050405020304" pitchFamily="18" charset="0"/>
+              </a:defRPr>
+            </a:lvl9pPr>
+          </a:lstStyle>
+          <a:p>
+            <a:pPr>
+              <a:spcBef>
+                <a:spcPct val="50000"/>
+              </a:spcBef>
+              <a:buFontTx/>
+              <a:buNone/>
+            </a:pPr>
+            <a:r>
+              <a:rPr lang="en-US" altLang="en-US" u="sng">
+                <a:solidFill>
+                  <a:srgbClr val="FF0000"/>
+                </a:solidFill>
+                <a:latin typeface="Tahoma" panose="020B0604030504040204" pitchFamily="34" charset="0"/>
+              </a:rPr>
+              <a:t>OUTPUT</a:t>
+            </a:r>
+          </a:p>
+          <a:p>
+            <a:pPr>
+              <a:spcBef>
+                <a:spcPct val="50000"/>
+              </a:spcBef>
+              <a:buFontTx/>
+              <a:buNone/>
+            </a:pPr>
+            <a:r>
+              <a:rPr lang="en-US" altLang="en-US">
+                <a:latin typeface="Tahoma" panose="020B0604030504040204" pitchFamily="34" charset="0"/>
+              </a:rPr>
+              <a:t>[7, 11, 10]</a:t>
+            </a:r>
+          </a:p>
+        </p:txBody>
+      </p:sp>
+      <p:grpSp>
+        <p:nvGrpSpPr>
+          <p:cNvPr id="14" name="Group 9" descr="The level order is shown after each new value is added at the end and then after it's swapped up to where it belongs:&#10;add(11): &#10;after add to end: 11&#10;after swap up: 11&#10;add(10): &#10;after add to end: 11, 10&#10;after swap up: 10, 11&#10;add(7): &#10;after add to end: 10, 11, 7&#10;after swap up: 7, 11, 10">
+            <a:extLst>
+              <a:ext uri="{FF2B5EF4-FFF2-40B4-BE49-F238E27FC236}">
+                <a16:creationId xmlns:a16="http://schemas.microsoft.com/office/drawing/2014/main" id="{F92E3FDE-58FC-38A0-BFB8-A969B4513A21}"/>
+              </a:ext>
+            </a:extLst>
+          </p:cNvPr>
+          <p:cNvGrpSpPr>
+            <a:grpSpLocks/>
+          </p:cNvGrpSpPr>
+          <p:nvPr/>
+        </p:nvGrpSpPr>
+        <p:grpSpPr bwMode="auto">
+          <a:xfrm>
+            <a:off x="457200" y="5059363"/>
+            <a:ext cx="8305800" cy="1570037"/>
+            <a:chOff x="457200" y="4907340"/>
+            <a:chExt cx="8305800" cy="1569660"/>
+          </a:xfrm>
+        </p:grpSpPr>
+        <p:sp>
+          <p:nvSpPr>
+            <p:cNvPr id="15" name="Text Box 4">
+              <a:extLst>
+                <a:ext uri="{FF2B5EF4-FFF2-40B4-BE49-F238E27FC236}">
+                  <a16:creationId xmlns:a16="http://schemas.microsoft.com/office/drawing/2014/main" id="{B93606F6-9E41-C4FE-A273-E52C23056ADD}"/>
+                </a:ext>
+              </a:extLst>
+            </p:cNvPr>
+            <p:cNvSpPr txBox="1">
+              <a:spLocks noChangeArrowheads="1"/>
+            </p:cNvSpPr>
+            <p:nvPr/>
+          </p:nvSpPr>
+          <p:spPr bwMode="auto">
+            <a:xfrm>
+              <a:off x="457200" y="4907340"/>
+              <a:ext cx="838200" cy="584775"/>
+            </a:xfrm>
+            <a:prstGeom prst="rect">
+              <a:avLst/>
+            </a:prstGeom>
+            <a:noFill/>
+            <a:ln>
+              <a:noFill/>
+            </a:ln>
+            <a:effectLst/>
+            <a:extLst>
+              <a:ext uri="{909E8E84-426E-40DD-AFC4-6F175D3DCCD1}">
+                <a14:hiddenFill xmlns:a14="http://schemas.microsoft.com/office/drawing/2010/main">
+                  <a:solidFill>
+                    <a:schemeClr val="accent1"/>
+                  </a:solidFill>
+                </a14:hiddenFill>
+              </a:ext>
+              <a:ext uri="{91240B29-F687-4F45-9708-019B960494DF}">
+                <a14:hiddenLine xmlns:a14="http://schemas.microsoft.com/office/drawing/2010/main" w="12700">
+                  <a:solidFill>
+                    <a:srgbClr val="000000"/>
+                  </a:solidFill>
+                  <a:miter lim="800000"/>
+                  <a:headEnd type="none" w="sm" len="sm"/>
+                  <a:tailEnd type="none" w="sm" len="sm"/>
+                </a14:hiddenLine>
+              </a:ext>
+              <a:ext uri="{AF507438-7753-43E0-B8FC-AC1667EBCBE1}">
+                <a14:hiddenEffects xmlns:a14="http://schemas.microsoft.com/office/drawing/2010/main">
+                  <a:effectLst>
+                    <a:outerShdw dist="35921" dir="2700000" algn="ctr" rotWithShape="0">
+                      <a:schemeClr val="bg2"/>
+                    </a:outerShdw>
+                  </a:effectLst>
+                </a14:hiddenEffects>
+              </a:ext>
+            </a:extLst>
+          </p:spPr>
+          <p:txBody>
+            <a:bodyPr>
+              <a:spAutoFit/>
+            </a:bodyPr>
+            <a:lstStyle>
+              <a:lvl1pPr>
+                <a:spcBef>
+                  <a:spcPct val="20000"/>
+                </a:spcBef>
+                <a:buChar char="•"/>
+                <a:defRPr sz="3200">
+                  <a:solidFill>
+                    <a:schemeClr val="tx1"/>
+                  </a:solidFill>
+                  <a:latin typeface="Times New Roman" panose="02020603050405020304" pitchFamily="18" charset="0"/>
+                </a:defRPr>
+              </a:lvl1pPr>
+              <a:lvl2pPr marL="742950" indent="-285750">
+                <a:spcBef>
+                  <a:spcPct val="20000"/>
+                </a:spcBef>
+                <a:buChar char="–"/>
+                <a:defRPr sz="2800">
+                  <a:solidFill>
+                    <a:schemeClr val="tx1"/>
+                  </a:solidFill>
+                  <a:latin typeface="Times New Roman" panose="02020603050405020304" pitchFamily="18" charset="0"/>
+                </a:defRPr>
+              </a:lvl2pPr>
+              <a:lvl3pPr marL="1143000" indent="-228600">
+                <a:spcBef>
+                  <a:spcPct val="20000"/>
+                </a:spcBef>
+                <a:buChar char="•"/>
+                <a:defRPr sz="2400">
+                  <a:solidFill>
+                    <a:schemeClr val="tx1"/>
+                  </a:solidFill>
+                  <a:latin typeface="Times New Roman" panose="02020603050405020304" pitchFamily="18" charset="0"/>
+                </a:defRPr>
+              </a:lvl3pPr>
+              <a:lvl4pPr marL="1600200" indent="-228600">
+                <a:spcBef>
+                  <a:spcPct val="20000"/>
+                </a:spcBef>
+                <a:buChar char="–"/>
+                <a:defRPr sz="2000">
+                  <a:solidFill>
+                    <a:schemeClr val="tx1"/>
+                  </a:solidFill>
+                  <a:latin typeface="Times New Roman" panose="02020603050405020304" pitchFamily="18" charset="0"/>
+                </a:defRPr>
+              </a:lvl4pPr>
+              <a:lvl5pPr marL="2057400" indent="-228600">
+                <a:spcBef>
+                  <a:spcPct val="20000"/>
+                </a:spcBef>
+                <a:buChar char="»"/>
+                <a:defRPr sz="2000">
+                  <a:solidFill>
+                    <a:schemeClr val="tx1"/>
+                  </a:solidFill>
+                  <a:latin typeface="Times New Roman" panose="02020603050405020304" pitchFamily="18" charset="0"/>
+                </a:defRPr>
+              </a:lvl5pPr>
+              <a:lvl6pPr marL="2514600" indent="-228600" eaLnBrk="0" fontAlgn="base" hangingPunct="0">
+                <a:spcBef>
+                  <a:spcPct val="20000"/>
+                </a:spcBef>
+                <a:spcAft>
+                  <a:spcPct val="0"/>
+                </a:spcAft>
+                <a:buChar char="»"/>
+                <a:defRPr sz="2000">
+                  <a:solidFill>
+                    <a:schemeClr val="tx1"/>
+                  </a:solidFill>
+                  <a:latin typeface="Times New Roman" panose="02020603050405020304" pitchFamily="18" charset="0"/>
+                </a:defRPr>
+              </a:lvl6pPr>
+              <a:lvl7pPr marL="2971800" indent="-228600" eaLnBrk="0" fontAlgn="base" hangingPunct="0">
+                <a:spcBef>
+                  <a:spcPct val="20000"/>
+                </a:spcBef>
+                <a:spcAft>
+                  <a:spcPct val="0"/>
+                </a:spcAft>
+                <a:buChar char="»"/>
+                <a:defRPr sz="2000">
+                  <a:solidFill>
+                    <a:schemeClr val="tx1"/>
+                  </a:solidFill>
+                  <a:latin typeface="Times New Roman" panose="02020603050405020304" pitchFamily="18" charset="0"/>
+                </a:defRPr>
+              </a:lvl7pPr>
+              <a:lvl8pPr marL="3429000" indent="-228600" eaLnBrk="0" fontAlgn="base" hangingPunct="0">
+                <a:spcBef>
+                  <a:spcPct val="20000"/>
+                </a:spcBef>
+                <a:spcAft>
+                  <a:spcPct val="0"/>
+                </a:spcAft>
+                <a:buChar char="»"/>
+                <a:defRPr sz="2000">
+                  <a:solidFill>
+                    <a:schemeClr val="tx1"/>
+                  </a:solidFill>
+                  <a:latin typeface="Times New Roman" panose="02020603050405020304" pitchFamily="18" charset="0"/>
+                </a:defRPr>
+              </a:lvl8pPr>
+              <a:lvl9pPr marL="3886200" indent="-228600" eaLnBrk="0" fontAlgn="base" hangingPunct="0">
+                <a:spcBef>
+                  <a:spcPct val="20000"/>
+                </a:spcBef>
+                <a:spcAft>
+                  <a:spcPct val="0"/>
+                </a:spcAft>
+                <a:buChar char="»"/>
+                <a:defRPr sz="2000">
+                  <a:solidFill>
+                    <a:schemeClr val="tx1"/>
+                  </a:solidFill>
+                  <a:latin typeface="Times New Roman" panose="02020603050405020304" pitchFamily="18" charset="0"/>
+                </a:defRPr>
+              </a:lvl9pPr>
+            </a:lstStyle>
+            <a:p>
+              <a:pPr>
+                <a:spcBef>
+                  <a:spcPct val="0"/>
+                </a:spcBef>
+                <a:buFontTx/>
+                <a:buNone/>
+              </a:pPr>
+              <a:r>
+                <a:rPr lang="en-US" altLang="en-US">
+                  <a:solidFill>
+                    <a:srgbClr val="7030A0"/>
+                  </a:solidFill>
+                  <a:latin typeface="Tahoma" panose="020B0604030504040204" pitchFamily="34" charset="0"/>
+                </a:rPr>
+                <a:t>11</a:t>
+              </a:r>
+            </a:p>
+          </p:txBody>
+        </p:sp>
+        <p:sp>
+          <p:nvSpPr>
+            <p:cNvPr id="16" name="Text Box 4">
+              <a:extLst>
+                <a:ext uri="{FF2B5EF4-FFF2-40B4-BE49-F238E27FC236}">
+                  <a16:creationId xmlns:a16="http://schemas.microsoft.com/office/drawing/2014/main" id="{54E0C9C4-3FAB-DE33-BD53-AEDBC33E39B9}"/>
+                </a:ext>
+              </a:extLst>
+            </p:cNvPr>
+            <p:cNvSpPr txBox="1">
+              <a:spLocks noChangeArrowheads="1"/>
+            </p:cNvSpPr>
+            <p:nvPr/>
+          </p:nvSpPr>
+          <p:spPr bwMode="auto">
+            <a:xfrm>
+              <a:off x="5083175" y="4907340"/>
+              <a:ext cx="1676400" cy="1569660"/>
+            </a:xfrm>
+            <a:prstGeom prst="rect">
+              <a:avLst/>
+            </a:prstGeom>
+            <a:noFill/>
+            <a:ln w="12700">
+              <a:noFill/>
+              <a:miter lim="800000"/>
+              <a:headEnd type="none" w="sm" len="sm"/>
+              <a:tailEnd type="none" w="sm" len="sm"/>
+            </a:ln>
+            <a:effectLst/>
+            <a:extLst>
+              <a:ext uri="{909E8E84-426E-40DD-AFC4-6F175D3DCCD1}">
+                <a14:hiddenFill xmlns:a14="http://schemas.microsoft.com/office/drawing/2010/main">
+                  <a:solidFill>
+                    <a:schemeClr val="accent1"/>
+                  </a:solidFill>
+                </a14:hiddenFill>
+              </a:ext>
+              <a:ext uri="{AF507438-7753-43E0-B8FC-AC1667EBCBE1}">
+                <a14:hiddenEffects xmlns:a14="http://schemas.microsoft.com/office/drawing/2010/main">
+                  <a:effectLst>
+                    <a:outerShdw dist="35921" dir="2700000" algn="ctr" rotWithShape="0">
+                      <a:schemeClr val="bg2"/>
+                    </a:outerShdw>
+                  </a:effectLst>
+                </a14:hiddenEffects>
+              </a:ext>
+            </a:extLst>
+          </p:spPr>
+          <p:txBody>
+            <a:bodyPr>
+              <a:spAutoFit/>
+            </a:bodyPr>
+            <a:lstStyle>
+              <a:lvl1pPr>
+                <a:spcBef>
+                  <a:spcPct val="20000"/>
+                </a:spcBef>
+                <a:buChar char="•"/>
+                <a:defRPr sz="3200">
+                  <a:solidFill>
+                    <a:schemeClr val="tx1"/>
+                  </a:solidFill>
+                  <a:latin typeface="Times New Roman" panose="02020603050405020304" pitchFamily="18" charset="0"/>
+                </a:defRPr>
+              </a:lvl1pPr>
+              <a:lvl2pPr marL="742950" indent="-285750">
+                <a:spcBef>
+                  <a:spcPct val="20000"/>
+                </a:spcBef>
+                <a:buChar char="–"/>
+                <a:defRPr sz="2800">
+                  <a:solidFill>
+                    <a:schemeClr val="tx1"/>
+                  </a:solidFill>
+                  <a:latin typeface="Times New Roman" panose="02020603050405020304" pitchFamily="18" charset="0"/>
+                </a:defRPr>
+              </a:lvl2pPr>
+              <a:lvl3pPr marL="1143000" indent="-228600">
+                <a:spcBef>
+                  <a:spcPct val="20000"/>
+                </a:spcBef>
+                <a:buChar char="•"/>
+                <a:defRPr sz="2400">
+                  <a:solidFill>
+                    <a:schemeClr val="tx1"/>
+                  </a:solidFill>
+                  <a:latin typeface="Times New Roman" panose="02020603050405020304" pitchFamily="18" charset="0"/>
+                </a:defRPr>
+              </a:lvl3pPr>
+              <a:lvl4pPr marL="1600200" indent="-228600">
+                <a:spcBef>
+                  <a:spcPct val="20000"/>
+                </a:spcBef>
+                <a:buChar char="–"/>
+                <a:defRPr sz="2000">
+                  <a:solidFill>
+                    <a:schemeClr val="tx1"/>
+                  </a:solidFill>
+                  <a:latin typeface="Times New Roman" panose="02020603050405020304" pitchFamily="18" charset="0"/>
+                </a:defRPr>
+              </a:lvl4pPr>
+              <a:lvl5pPr marL="2057400" indent="-228600">
+                <a:spcBef>
+                  <a:spcPct val="20000"/>
+                </a:spcBef>
+                <a:buChar char="»"/>
+                <a:defRPr sz="2000">
+                  <a:solidFill>
+                    <a:schemeClr val="tx1"/>
+                  </a:solidFill>
+                  <a:latin typeface="Times New Roman" panose="02020603050405020304" pitchFamily="18" charset="0"/>
+                </a:defRPr>
+              </a:lvl5pPr>
+              <a:lvl6pPr marL="2514600" indent="-228600" eaLnBrk="0" fontAlgn="base" hangingPunct="0">
+                <a:spcBef>
+                  <a:spcPct val="20000"/>
+                </a:spcBef>
+                <a:spcAft>
+                  <a:spcPct val="0"/>
+                </a:spcAft>
+                <a:buChar char="»"/>
+                <a:defRPr sz="2000">
+                  <a:solidFill>
+                    <a:schemeClr val="tx1"/>
+                  </a:solidFill>
+                  <a:latin typeface="Times New Roman" panose="02020603050405020304" pitchFamily="18" charset="0"/>
+                </a:defRPr>
+              </a:lvl6pPr>
+              <a:lvl7pPr marL="2971800" indent="-228600" eaLnBrk="0" fontAlgn="base" hangingPunct="0">
+                <a:spcBef>
+                  <a:spcPct val="20000"/>
+                </a:spcBef>
+                <a:spcAft>
+                  <a:spcPct val="0"/>
+                </a:spcAft>
+                <a:buChar char="»"/>
+                <a:defRPr sz="2000">
+                  <a:solidFill>
+                    <a:schemeClr val="tx1"/>
+                  </a:solidFill>
+                  <a:latin typeface="Times New Roman" panose="02020603050405020304" pitchFamily="18" charset="0"/>
+                </a:defRPr>
+              </a:lvl7pPr>
+              <a:lvl8pPr marL="3429000" indent="-228600" eaLnBrk="0" fontAlgn="base" hangingPunct="0">
+                <a:spcBef>
+                  <a:spcPct val="20000"/>
+                </a:spcBef>
+                <a:spcAft>
+                  <a:spcPct val="0"/>
+                </a:spcAft>
+                <a:buChar char="»"/>
+                <a:defRPr sz="2000">
+                  <a:solidFill>
+                    <a:schemeClr val="tx1"/>
+                  </a:solidFill>
+                  <a:latin typeface="Times New Roman" panose="02020603050405020304" pitchFamily="18" charset="0"/>
+                </a:defRPr>
+              </a:lvl8pPr>
+              <a:lvl9pPr marL="3886200" indent="-228600" eaLnBrk="0" fontAlgn="base" hangingPunct="0">
+                <a:spcBef>
+                  <a:spcPct val="20000"/>
+                </a:spcBef>
+                <a:spcAft>
+                  <a:spcPct val="0"/>
+                </a:spcAft>
+                <a:buChar char="»"/>
+                <a:defRPr sz="2000">
+                  <a:solidFill>
+                    <a:schemeClr val="tx1"/>
+                  </a:solidFill>
+                  <a:latin typeface="Times New Roman" panose="02020603050405020304" pitchFamily="18" charset="0"/>
+                </a:defRPr>
+              </a:lvl9pPr>
+            </a:lstStyle>
+            <a:p>
+              <a:pPr>
+                <a:spcBef>
+                  <a:spcPts val="0"/>
+                </a:spcBef>
+                <a:buFontTx/>
+                <a:buNone/>
+                <a:defRPr/>
+              </a:pPr>
+              <a:r>
+                <a:rPr lang="en-US" altLang="en-US" dirty="0">
+                  <a:solidFill>
+                    <a:srgbClr val="7030A0"/>
+                  </a:solidFill>
+                  <a:latin typeface="Tahoma" panose="020B0604030504040204" pitchFamily="34" charset="0"/>
+                </a:rPr>
+                <a:t> </a:t>
+              </a:r>
+              <a:r>
+                <a:rPr lang="en-US" altLang="en-US" sz="1050" dirty="0">
+                  <a:solidFill>
+                    <a:srgbClr val="7030A0"/>
+                  </a:solidFill>
+                  <a:latin typeface="Tahoma" panose="020B0604030504040204" pitchFamily="34" charset="0"/>
+                </a:rPr>
+                <a:t> </a:t>
+              </a:r>
+              <a:r>
+                <a:rPr lang="en-US" altLang="en-US" sz="2000" dirty="0">
+                  <a:solidFill>
+                    <a:srgbClr val="7030A0"/>
+                  </a:solidFill>
+                  <a:latin typeface="Tahoma" panose="020B0604030504040204" pitchFamily="34" charset="0"/>
+                </a:rPr>
+                <a:t> </a:t>
+              </a:r>
+              <a:r>
+                <a:rPr lang="en-US" altLang="en-US" dirty="0">
+                  <a:solidFill>
+                    <a:srgbClr val="7030A0"/>
+                  </a:solidFill>
+                  <a:latin typeface="Tahoma" panose="020B0604030504040204" pitchFamily="34" charset="0"/>
+                </a:rPr>
+                <a:t> </a:t>
+              </a:r>
+              <a:r>
+                <a:rPr lang="en-US" altLang="en-US" sz="1050" dirty="0">
+                  <a:solidFill>
+                    <a:srgbClr val="7030A0"/>
+                  </a:solidFill>
+                  <a:latin typeface="Tahoma" panose="020B0604030504040204" pitchFamily="34" charset="0"/>
+                </a:rPr>
+                <a:t> </a:t>
+              </a:r>
+              <a:r>
+                <a:rPr lang="en-US" altLang="en-US" dirty="0">
+                  <a:solidFill>
+                    <a:srgbClr val="7030A0"/>
+                  </a:solidFill>
+                  <a:latin typeface="Tahoma" panose="020B0604030504040204" pitchFamily="34" charset="0"/>
+                </a:rPr>
+                <a:t>10</a:t>
+              </a:r>
+            </a:p>
+            <a:p>
+              <a:pPr>
+                <a:spcBef>
+                  <a:spcPts val="0"/>
+                </a:spcBef>
+                <a:buFontTx/>
+                <a:buNone/>
+                <a:defRPr/>
+              </a:pPr>
+              <a:r>
+                <a:rPr lang="en-US" altLang="en-US" dirty="0">
+                  <a:solidFill>
+                    <a:srgbClr val="7030A0"/>
+                  </a:solidFill>
+                  <a:latin typeface="Tahoma" panose="020B0604030504040204" pitchFamily="34" charset="0"/>
+                </a:rPr>
+                <a:t>  </a:t>
+              </a:r>
+              <a:r>
+                <a:rPr lang="en-US" altLang="en-US" dirty="0">
+                  <a:solidFill>
+                    <a:schemeClr val="bg2"/>
+                  </a:solidFill>
+                  <a:latin typeface="Tahoma" panose="020B0604030504040204" pitchFamily="34" charset="0"/>
+                </a:rPr>
+                <a:t>/   \</a:t>
+              </a:r>
+            </a:p>
+            <a:p>
+              <a:pPr>
+                <a:spcBef>
+                  <a:spcPts val="0"/>
+                </a:spcBef>
+                <a:buFontTx/>
+                <a:buNone/>
+                <a:defRPr/>
+              </a:pPr>
+              <a:r>
+                <a:rPr lang="en-US" altLang="en-US" dirty="0">
+                  <a:solidFill>
+                    <a:srgbClr val="7030A0"/>
+                  </a:solidFill>
+                  <a:latin typeface="Tahoma" panose="020B0604030504040204" pitchFamily="34" charset="0"/>
+                </a:rPr>
+                <a:t>11    </a:t>
+              </a:r>
+              <a:r>
+                <a:rPr lang="en-US" altLang="en-US" dirty="0">
+                  <a:solidFill>
+                    <a:srgbClr val="0070C0"/>
+                  </a:solidFill>
+                  <a:latin typeface="Tahoma" panose="020B0604030504040204" pitchFamily="34" charset="0"/>
+                </a:rPr>
+                <a:t>7</a:t>
+              </a:r>
+            </a:p>
+          </p:txBody>
+        </p:sp>
+        <p:sp>
+          <p:nvSpPr>
+            <p:cNvPr id="17" name="Text Box 4">
+              <a:extLst>
+                <a:ext uri="{FF2B5EF4-FFF2-40B4-BE49-F238E27FC236}">
+                  <a16:creationId xmlns:a16="http://schemas.microsoft.com/office/drawing/2014/main" id="{6533C3F4-7F65-077B-762F-1994F693569A}"/>
+                </a:ext>
+              </a:extLst>
+            </p:cNvPr>
+            <p:cNvSpPr txBox="1">
+              <a:spLocks noChangeArrowheads="1"/>
+            </p:cNvSpPr>
+            <p:nvPr/>
+          </p:nvSpPr>
+          <p:spPr bwMode="auto">
+            <a:xfrm>
+              <a:off x="3425147" y="4907340"/>
+              <a:ext cx="1676400" cy="1569660"/>
+            </a:xfrm>
+            <a:prstGeom prst="rect">
+              <a:avLst/>
+            </a:prstGeom>
+            <a:noFill/>
+            <a:ln>
+              <a:noFill/>
+            </a:ln>
+            <a:effectLst/>
+            <a:extLst>
+              <a:ext uri="{909E8E84-426E-40DD-AFC4-6F175D3DCCD1}">
+                <a14:hiddenFill xmlns:a14="http://schemas.microsoft.com/office/drawing/2010/main">
+                  <a:solidFill>
+                    <a:schemeClr val="accent1"/>
+                  </a:solidFill>
+                </a14:hiddenFill>
+              </a:ext>
+              <a:ext uri="{91240B29-F687-4F45-9708-019B960494DF}">
+                <a14:hiddenLine xmlns:a14="http://schemas.microsoft.com/office/drawing/2010/main" w="12700">
+                  <a:solidFill>
+                    <a:srgbClr val="000000"/>
+                  </a:solidFill>
+                  <a:miter lim="800000"/>
+                  <a:headEnd type="none" w="sm" len="sm"/>
+                  <a:tailEnd type="none" w="sm" len="sm"/>
+                </a14:hiddenLine>
+              </a:ext>
+              <a:ext uri="{AF507438-7753-43E0-B8FC-AC1667EBCBE1}">
+                <a14:hiddenEffects xmlns:a14="http://schemas.microsoft.com/office/drawing/2010/main">
+                  <a:effectLst>
+                    <a:outerShdw dist="35921" dir="2700000" algn="ctr" rotWithShape="0">
+                      <a:schemeClr val="bg2"/>
+                    </a:outerShdw>
+                  </a:effectLst>
+                </a14:hiddenEffects>
+              </a:ext>
+            </a:extLst>
+          </p:spPr>
+          <p:txBody>
+            <a:bodyPr>
+              <a:spAutoFit/>
+            </a:bodyPr>
+            <a:lstStyle>
+              <a:lvl1pPr>
+                <a:spcBef>
+                  <a:spcPct val="20000"/>
+                </a:spcBef>
+                <a:buChar char="•"/>
+                <a:defRPr sz="3200">
+                  <a:solidFill>
+                    <a:schemeClr val="tx1"/>
+                  </a:solidFill>
+                  <a:latin typeface="Times New Roman" panose="02020603050405020304" pitchFamily="18" charset="0"/>
+                </a:defRPr>
+              </a:lvl1pPr>
+              <a:lvl2pPr marL="742950" indent="-285750">
+                <a:spcBef>
+                  <a:spcPct val="20000"/>
+                </a:spcBef>
+                <a:buChar char="–"/>
+                <a:defRPr sz="2800">
+                  <a:solidFill>
+                    <a:schemeClr val="tx1"/>
+                  </a:solidFill>
+                  <a:latin typeface="Times New Roman" panose="02020603050405020304" pitchFamily="18" charset="0"/>
+                </a:defRPr>
+              </a:lvl2pPr>
+              <a:lvl3pPr marL="1143000" indent="-228600">
+                <a:spcBef>
+                  <a:spcPct val="20000"/>
+                </a:spcBef>
+                <a:buChar char="•"/>
+                <a:defRPr sz="2400">
+                  <a:solidFill>
+                    <a:schemeClr val="tx1"/>
+                  </a:solidFill>
+                  <a:latin typeface="Times New Roman" panose="02020603050405020304" pitchFamily="18" charset="0"/>
+                </a:defRPr>
+              </a:lvl3pPr>
+              <a:lvl4pPr marL="1600200" indent="-228600">
+                <a:spcBef>
+                  <a:spcPct val="20000"/>
+                </a:spcBef>
+                <a:buChar char="–"/>
+                <a:defRPr sz="2000">
+                  <a:solidFill>
+                    <a:schemeClr val="tx1"/>
+                  </a:solidFill>
+                  <a:latin typeface="Times New Roman" panose="02020603050405020304" pitchFamily="18" charset="0"/>
+                </a:defRPr>
+              </a:lvl4pPr>
+              <a:lvl5pPr marL="2057400" indent="-228600">
+                <a:spcBef>
+                  <a:spcPct val="20000"/>
+                </a:spcBef>
+                <a:buChar char="»"/>
+                <a:defRPr sz="2000">
+                  <a:solidFill>
+                    <a:schemeClr val="tx1"/>
+                  </a:solidFill>
+                  <a:latin typeface="Times New Roman" panose="02020603050405020304" pitchFamily="18" charset="0"/>
+                </a:defRPr>
+              </a:lvl5pPr>
+              <a:lvl6pPr marL="2514600" indent="-228600" eaLnBrk="0" fontAlgn="base" hangingPunct="0">
+                <a:spcBef>
+                  <a:spcPct val="20000"/>
+                </a:spcBef>
+                <a:spcAft>
+                  <a:spcPct val="0"/>
+                </a:spcAft>
+                <a:buChar char="»"/>
+                <a:defRPr sz="2000">
+                  <a:solidFill>
+                    <a:schemeClr val="tx1"/>
+                  </a:solidFill>
+                  <a:latin typeface="Times New Roman" panose="02020603050405020304" pitchFamily="18" charset="0"/>
+                </a:defRPr>
+              </a:lvl6pPr>
+              <a:lvl7pPr marL="2971800" indent="-228600" eaLnBrk="0" fontAlgn="base" hangingPunct="0">
+                <a:spcBef>
+                  <a:spcPct val="20000"/>
+                </a:spcBef>
+                <a:spcAft>
+                  <a:spcPct val="0"/>
+                </a:spcAft>
+                <a:buChar char="»"/>
+                <a:defRPr sz="2000">
+                  <a:solidFill>
+                    <a:schemeClr val="tx1"/>
+                  </a:solidFill>
+                  <a:latin typeface="Times New Roman" panose="02020603050405020304" pitchFamily="18" charset="0"/>
+                </a:defRPr>
+              </a:lvl7pPr>
+              <a:lvl8pPr marL="3429000" indent="-228600" eaLnBrk="0" fontAlgn="base" hangingPunct="0">
+                <a:spcBef>
+                  <a:spcPct val="20000"/>
+                </a:spcBef>
+                <a:spcAft>
+                  <a:spcPct val="0"/>
+                </a:spcAft>
+                <a:buChar char="»"/>
+                <a:defRPr sz="2000">
+                  <a:solidFill>
+                    <a:schemeClr val="tx1"/>
+                  </a:solidFill>
+                  <a:latin typeface="Times New Roman" panose="02020603050405020304" pitchFamily="18" charset="0"/>
+                </a:defRPr>
+              </a:lvl8pPr>
+              <a:lvl9pPr marL="3886200" indent="-228600" eaLnBrk="0" fontAlgn="base" hangingPunct="0">
+                <a:spcBef>
+                  <a:spcPct val="20000"/>
+                </a:spcBef>
+                <a:spcAft>
+                  <a:spcPct val="0"/>
+                </a:spcAft>
+                <a:buChar char="»"/>
+                <a:defRPr sz="2000">
+                  <a:solidFill>
+                    <a:schemeClr val="tx1"/>
+                  </a:solidFill>
+                  <a:latin typeface="Times New Roman" panose="02020603050405020304" pitchFamily="18" charset="0"/>
+                </a:defRPr>
+              </a:lvl9pPr>
+            </a:lstStyle>
+            <a:p>
+              <a:pPr>
+                <a:spcBef>
+                  <a:spcPct val="0"/>
+                </a:spcBef>
+                <a:buFontTx/>
+                <a:buNone/>
+              </a:pPr>
+              <a:r>
+                <a:rPr lang="en-US" altLang="en-US">
+                  <a:solidFill>
+                    <a:srgbClr val="7030A0"/>
+                  </a:solidFill>
+                  <a:latin typeface="Tahoma" panose="020B0604030504040204" pitchFamily="34" charset="0"/>
+                </a:rPr>
+                <a:t>  </a:t>
+              </a:r>
+              <a:r>
+                <a:rPr lang="en-US" altLang="en-US" sz="2000">
+                  <a:solidFill>
+                    <a:srgbClr val="7030A0"/>
+                  </a:solidFill>
+                  <a:latin typeface="Tahoma" panose="020B0604030504040204" pitchFamily="34" charset="0"/>
+                </a:rPr>
+                <a:t> </a:t>
+              </a:r>
+              <a:r>
+                <a:rPr lang="en-US" altLang="en-US">
+                  <a:solidFill>
+                    <a:srgbClr val="7030A0"/>
+                  </a:solidFill>
+                  <a:latin typeface="Tahoma" panose="020B0604030504040204" pitchFamily="34" charset="0"/>
+                </a:rPr>
+                <a:t> 10</a:t>
+              </a:r>
+            </a:p>
+            <a:p>
+              <a:pPr>
+                <a:spcBef>
+                  <a:spcPct val="0"/>
+                </a:spcBef>
+                <a:buFontTx/>
+                <a:buNone/>
+              </a:pPr>
+              <a:r>
+                <a:rPr lang="en-US" altLang="en-US">
+                  <a:solidFill>
+                    <a:srgbClr val="7030A0"/>
+                  </a:solidFill>
+                  <a:latin typeface="Tahoma" panose="020B0604030504040204" pitchFamily="34" charset="0"/>
+                </a:rPr>
+                <a:t>  </a:t>
+              </a:r>
+              <a:r>
+                <a:rPr lang="en-US" altLang="en-US">
+                  <a:solidFill>
+                    <a:schemeClr val="bg2"/>
+                  </a:solidFill>
+                  <a:latin typeface="Tahoma" panose="020B0604030504040204" pitchFamily="34" charset="0"/>
+                </a:rPr>
+                <a:t>/</a:t>
+              </a:r>
+              <a:r>
+                <a:rPr lang="en-US" altLang="en-US">
+                  <a:solidFill>
+                    <a:srgbClr val="7030A0"/>
+                  </a:solidFill>
+                  <a:latin typeface="Tahoma" panose="020B0604030504040204" pitchFamily="34" charset="0"/>
+                </a:rPr>
+                <a:t>   </a:t>
+              </a:r>
+            </a:p>
+            <a:p>
+              <a:pPr>
+                <a:spcBef>
+                  <a:spcPct val="0"/>
+                </a:spcBef>
+                <a:buFontTx/>
+                <a:buNone/>
+              </a:pPr>
+              <a:r>
+                <a:rPr lang="en-US" altLang="en-US">
+                  <a:solidFill>
+                    <a:srgbClr val="7030A0"/>
+                  </a:solidFill>
+                  <a:latin typeface="Tahoma" panose="020B0604030504040204" pitchFamily="34" charset="0"/>
+                </a:rPr>
+                <a:t>11   </a:t>
+              </a:r>
+            </a:p>
+          </p:txBody>
+        </p:sp>
+        <p:sp>
+          <p:nvSpPr>
+            <p:cNvPr id="18" name="Text Box 4">
+              <a:extLst>
+                <a:ext uri="{FF2B5EF4-FFF2-40B4-BE49-F238E27FC236}">
+                  <a16:creationId xmlns:a16="http://schemas.microsoft.com/office/drawing/2014/main" id="{E6C229C8-6644-2378-5019-524EBEA06BFA}"/>
+                </a:ext>
+              </a:extLst>
+            </p:cNvPr>
+            <p:cNvSpPr txBox="1">
+              <a:spLocks noChangeArrowheads="1"/>
+            </p:cNvSpPr>
+            <p:nvPr/>
+          </p:nvSpPr>
+          <p:spPr bwMode="auto">
+            <a:xfrm>
+              <a:off x="1668694" y="4907340"/>
+              <a:ext cx="1676400" cy="1569660"/>
+            </a:xfrm>
+            <a:prstGeom prst="rect">
+              <a:avLst/>
+            </a:prstGeom>
+            <a:noFill/>
+            <a:ln>
+              <a:noFill/>
+            </a:ln>
+            <a:effectLst/>
+            <a:extLst>
+              <a:ext uri="{909E8E84-426E-40DD-AFC4-6F175D3DCCD1}">
+                <a14:hiddenFill xmlns:a14="http://schemas.microsoft.com/office/drawing/2010/main">
+                  <a:solidFill>
+                    <a:schemeClr val="accent1"/>
+                  </a:solidFill>
+                </a14:hiddenFill>
+              </a:ext>
+              <a:ext uri="{91240B29-F687-4F45-9708-019B960494DF}">
+                <a14:hiddenLine xmlns:a14="http://schemas.microsoft.com/office/drawing/2010/main" w="12700">
+                  <a:solidFill>
+                    <a:srgbClr val="000000"/>
+                  </a:solidFill>
+                  <a:miter lim="800000"/>
+                  <a:headEnd type="none" w="sm" len="sm"/>
+                  <a:tailEnd type="none" w="sm" len="sm"/>
+                </a14:hiddenLine>
+              </a:ext>
+              <a:ext uri="{AF507438-7753-43E0-B8FC-AC1667EBCBE1}">
+                <a14:hiddenEffects xmlns:a14="http://schemas.microsoft.com/office/drawing/2010/main">
+                  <a:effectLst>
+                    <a:outerShdw dist="35921" dir="2700000" algn="ctr" rotWithShape="0">
+                      <a:schemeClr val="bg2"/>
+                    </a:outerShdw>
+                  </a:effectLst>
+                </a14:hiddenEffects>
+              </a:ext>
+            </a:extLst>
+          </p:spPr>
+          <p:txBody>
+            <a:bodyPr>
+              <a:spAutoFit/>
+            </a:bodyPr>
+            <a:lstStyle>
+              <a:lvl1pPr>
+                <a:spcBef>
+                  <a:spcPct val="20000"/>
+                </a:spcBef>
+                <a:buChar char="•"/>
+                <a:defRPr sz="3200">
+                  <a:solidFill>
+                    <a:schemeClr val="tx1"/>
+                  </a:solidFill>
+                  <a:latin typeface="Times New Roman" panose="02020603050405020304" pitchFamily="18" charset="0"/>
+                </a:defRPr>
+              </a:lvl1pPr>
+              <a:lvl2pPr marL="742950" indent="-285750">
+                <a:spcBef>
+                  <a:spcPct val="20000"/>
+                </a:spcBef>
+                <a:buChar char="–"/>
+                <a:defRPr sz="2800">
+                  <a:solidFill>
+                    <a:schemeClr val="tx1"/>
+                  </a:solidFill>
+                  <a:latin typeface="Times New Roman" panose="02020603050405020304" pitchFamily="18" charset="0"/>
+                </a:defRPr>
+              </a:lvl2pPr>
+              <a:lvl3pPr marL="1143000" indent="-228600">
+                <a:spcBef>
+                  <a:spcPct val="20000"/>
+                </a:spcBef>
+                <a:buChar char="•"/>
+                <a:defRPr sz="2400">
+                  <a:solidFill>
+                    <a:schemeClr val="tx1"/>
+                  </a:solidFill>
+                  <a:latin typeface="Times New Roman" panose="02020603050405020304" pitchFamily="18" charset="0"/>
+                </a:defRPr>
+              </a:lvl3pPr>
+              <a:lvl4pPr marL="1600200" indent="-228600">
+                <a:spcBef>
+                  <a:spcPct val="20000"/>
+                </a:spcBef>
+                <a:buChar char="–"/>
+                <a:defRPr sz="2000">
+                  <a:solidFill>
+                    <a:schemeClr val="tx1"/>
+                  </a:solidFill>
+                  <a:latin typeface="Times New Roman" panose="02020603050405020304" pitchFamily="18" charset="0"/>
+                </a:defRPr>
+              </a:lvl4pPr>
+              <a:lvl5pPr marL="2057400" indent="-228600">
+                <a:spcBef>
+                  <a:spcPct val="20000"/>
+                </a:spcBef>
+                <a:buChar char="»"/>
+                <a:defRPr sz="2000">
+                  <a:solidFill>
+                    <a:schemeClr val="tx1"/>
+                  </a:solidFill>
+                  <a:latin typeface="Times New Roman" panose="02020603050405020304" pitchFamily="18" charset="0"/>
+                </a:defRPr>
+              </a:lvl5pPr>
+              <a:lvl6pPr marL="2514600" indent="-228600" eaLnBrk="0" fontAlgn="base" hangingPunct="0">
+                <a:spcBef>
+                  <a:spcPct val="20000"/>
+                </a:spcBef>
+                <a:spcAft>
+                  <a:spcPct val="0"/>
+                </a:spcAft>
+                <a:buChar char="»"/>
+                <a:defRPr sz="2000">
+                  <a:solidFill>
+                    <a:schemeClr val="tx1"/>
+                  </a:solidFill>
+                  <a:latin typeface="Times New Roman" panose="02020603050405020304" pitchFamily="18" charset="0"/>
+                </a:defRPr>
+              </a:lvl6pPr>
+              <a:lvl7pPr marL="2971800" indent="-228600" eaLnBrk="0" fontAlgn="base" hangingPunct="0">
+                <a:spcBef>
+                  <a:spcPct val="20000"/>
+                </a:spcBef>
+                <a:spcAft>
+                  <a:spcPct val="0"/>
+                </a:spcAft>
+                <a:buChar char="»"/>
+                <a:defRPr sz="2000">
+                  <a:solidFill>
+                    <a:schemeClr val="tx1"/>
+                  </a:solidFill>
+                  <a:latin typeface="Times New Roman" panose="02020603050405020304" pitchFamily="18" charset="0"/>
+                </a:defRPr>
+              </a:lvl7pPr>
+              <a:lvl8pPr marL="3429000" indent="-228600" eaLnBrk="0" fontAlgn="base" hangingPunct="0">
+                <a:spcBef>
+                  <a:spcPct val="20000"/>
+                </a:spcBef>
+                <a:spcAft>
+                  <a:spcPct val="0"/>
+                </a:spcAft>
+                <a:buChar char="»"/>
+                <a:defRPr sz="2000">
+                  <a:solidFill>
+                    <a:schemeClr val="tx1"/>
+                  </a:solidFill>
+                  <a:latin typeface="Times New Roman" panose="02020603050405020304" pitchFamily="18" charset="0"/>
+                </a:defRPr>
+              </a:lvl8pPr>
+              <a:lvl9pPr marL="3886200" indent="-228600" eaLnBrk="0" fontAlgn="base" hangingPunct="0">
+                <a:spcBef>
+                  <a:spcPct val="20000"/>
+                </a:spcBef>
+                <a:spcAft>
+                  <a:spcPct val="0"/>
+                </a:spcAft>
+                <a:buChar char="»"/>
+                <a:defRPr sz="2000">
+                  <a:solidFill>
+                    <a:schemeClr val="tx1"/>
+                  </a:solidFill>
+                  <a:latin typeface="Times New Roman" panose="02020603050405020304" pitchFamily="18" charset="0"/>
+                </a:defRPr>
+              </a:lvl9pPr>
+            </a:lstStyle>
+            <a:p>
+              <a:pPr>
+                <a:spcBef>
+                  <a:spcPct val="0"/>
+                </a:spcBef>
+                <a:buFontTx/>
+                <a:buNone/>
+              </a:pPr>
+              <a:r>
+                <a:rPr lang="en-US" altLang="en-US" dirty="0">
+                  <a:solidFill>
+                    <a:srgbClr val="7030A0"/>
+                  </a:solidFill>
+                  <a:latin typeface="Tahoma" panose="020B0604030504040204" pitchFamily="34" charset="0"/>
+                </a:rPr>
+                <a:t>  </a:t>
+              </a:r>
+              <a:r>
+                <a:rPr lang="en-US" altLang="en-US" sz="2000" dirty="0">
+                  <a:solidFill>
+                    <a:srgbClr val="7030A0"/>
+                  </a:solidFill>
+                  <a:latin typeface="Tahoma" panose="020B0604030504040204" pitchFamily="34" charset="0"/>
+                </a:rPr>
+                <a:t> </a:t>
+              </a:r>
+              <a:r>
+                <a:rPr lang="en-US" altLang="en-US" dirty="0">
+                  <a:solidFill>
+                    <a:srgbClr val="7030A0"/>
+                  </a:solidFill>
+                  <a:latin typeface="Tahoma" panose="020B0604030504040204" pitchFamily="34" charset="0"/>
+                </a:rPr>
+                <a:t> 11</a:t>
+              </a:r>
+            </a:p>
+            <a:p>
+              <a:pPr>
+                <a:spcBef>
+                  <a:spcPct val="0"/>
+                </a:spcBef>
+                <a:buFontTx/>
+                <a:buNone/>
+              </a:pPr>
+              <a:r>
+                <a:rPr lang="en-US" altLang="en-US" dirty="0">
+                  <a:solidFill>
+                    <a:srgbClr val="7030A0"/>
+                  </a:solidFill>
+                  <a:latin typeface="Tahoma" panose="020B0604030504040204" pitchFamily="34" charset="0"/>
+                </a:rPr>
+                <a:t>  </a:t>
+              </a:r>
+              <a:r>
+                <a:rPr lang="en-US" altLang="en-US" dirty="0">
+                  <a:solidFill>
+                    <a:schemeClr val="bg2"/>
+                  </a:solidFill>
+                  <a:latin typeface="Tahoma" panose="020B0604030504040204" pitchFamily="34" charset="0"/>
+                </a:rPr>
+                <a:t>/</a:t>
+              </a:r>
+              <a:r>
+                <a:rPr lang="en-US" altLang="en-US" dirty="0">
+                  <a:solidFill>
+                    <a:srgbClr val="7030A0"/>
+                  </a:solidFill>
+                  <a:latin typeface="Tahoma" panose="020B0604030504040204" pitchFamily="34" charset="0"/>
+                </a:rPr>
+                <a:t>   </a:t>
+              </a:r>
+            </a:p>
+            <a:p>
+              <a:pPr>
+                <a:spcBef>
+                  <a:spcPct val="0"/>
+                </a:spcBef>
+                <a:buFontTx/>
+                <a:buNone/>
+              </a:pPr>
+              <a:r>
+                <a:rPr lang="en-US" altLang="en-US" dirty="0">
+                  <a:solidFill>
+                    <a:srgbClr val="0070C0"/>
+                  </a:solidFill>
+                  <a:latin typeface="Tahoma" panose="020B0604030504040204" pitchFamily="34" charset="0"/>
+                </a:rPr>
+                <a:t>10</a:t>
+              </a:r>
+              <a:r>
+                <a:rPr lang="en-US" altLang="en-US" dirty="0">
+                  <a:solidFill>
+                    <a:srgbClr val="7030A0"/>
+                  </a:solidFill>
+                  <a:latin typeface="Tahoma" panose="020B0604030504040204" pitchFamily="34" charset="0"/>
+                </a:rPr>
+                <a:t>   </a:t>
+              </a:r>
+            </a:p>
+          </p:txBody>
+        </p:sp>
+        <p:sp>
+          <p:nvSpPr>
+            <p:cNvPr id="19" name="Text Box 4">
+              <a:extLst>
+                <a:ext uri="{FF2B5EF4-FFF2-40B4-BE49-F238E27FC236}">
+                  <a16:creationId xmlns:a16="http://schemas.microsoft.com/office/drawing/2014/main" id="{C39CE893-B7A6-7E68-1391-DC31568F6A28}"/>
+                </a:ext>
+              </a:extLst>
+            </p:cNvPr>
+            <p:cNvSpPr txBox="1">
+              <a:spLocks noChangeArrowheads="1"/>
+            </p:cNvSpPr>
+            <p:nvPr/>
+          </p:nvSpPr>
+          <p:spPr bwMode="auto">
+            <a:xfrm>
+              <a:off x="7086600" y="4907340"/>
+              <a:ext cx="1676400" cy="1569660"/>
+            </a:xfrm>
+            <a:prstGeom prst="rect">
+              <a:avLst/>
+            </a:prstGeom>
+            <a:noFill/>
+            <a:ln>
+              <a:noFill/>
+            </a:ln>
+            <a:effectLst/>
+            <a:extLst>
+              <a:ext uri="{909E8E84-426E-40DD-AFC4-6F175D3DCCD1}">
+                <a14:hiddenFill xmlns:a14="http://schemas.microsoft.com/office/drawing/2010/main">
+                  <a:solidFill>
+                    <a:schemeClr val="accent1"/>
+                  </a:solidFill>
+                </a14:hiddenFill>
+              </a:ext>
+              <a:ext uri="{91240B29-F687-4F45-9708-019B960494DF}">
+                <a14:hiddenLine xmlns:a14="http://schemas.microsoft.com/office/drawing/2010/main" w="12700">
+                  <a:solidFill>
+                    <a:srgbClr val="000000"/>
+                  </a:solidFill>
+                  <a:miter lim="800000"/>
+                  <a:headEnd type="none" w="sm" len="sm"/>
+                  <a:tailEnd type="none" w="sm" len="sm"/>
+                </a14:hiddenLine>
+              </a:ext>
+              <a:ext uri="{AF507438-7753-43E0-B8FC-AC1667EBCBE1}">
+                <a14:hiddenEffects xmlns:a14="http://schemas.microsoft.com/office/drawing/2010/main">
+                  <a:effectLst>
+                    <a:outerShdw dist="35921" dir="2700000" algn="ctr" rotWithShape="0">
+                      <a:schemeClr val="bg2"/>
+                    </a:outerShdw>
+                  </a:effectLst>
+                </a14:hiddenEffects>
+              </a:ext>
+            </a:extLst>
+          </p:spPr>
+          <p:txBody>
+            <a:bodyPr>
+              <a:spAutoFit/>
+            </a:bodyPr>
+            <a:lstStyle>
+              <a:lvl1pPr>
+                <a:spcBef>
+                  <a:spcPct val="20000"/>
+                </a:spcBef>
+                <a:buChar char="•"/>
+                <a:defRPr sz="3200">
+                  <a:solidFill>
+                    <a:schemeClr val="tx1"/>
+                  </a:solidFill>
+                  <a:latin typeface="Times New Roman" panose="02020603050405020304" pitchFamily="18" charset="0"/>
+                </a:defRPr>
+              </a:lvl1pPr>
+              <a:lvl2pPr marL="742950" indent="-285750">
+                <a:spcBef>
+                  <a:spcPct val="20000"/>
+                </a:spcBef>
+                <a:buChar char="–"/>
+                <a:defRPr sz="2800">
+                  <a:solidFill>
+                    <a:schemeClr val="tx1"/>
+                  </a:solidFill>
+                  <a:latin typeface="Times New Roman" panose="02020603050405020304" pitchFamily="18" charset="0"/>
+                </a:defRPr>
+              </a:lvl2pPr>
+              <a:lvl3pPr marL="1143000" indent="-228600">
+                <a:spcBef>
+                  <a:spcPct val="20000"/>
+                </a:spcBef>
+                <a:buChar char="•"/>
+                <a:defRPr sz="2400">
+                  <a:solidFill>
+                    <a:schemeClr val="tx1"/>
+                  </a:solidFill>
+                  <a:latin typeface="Times New Roman" panose="02020603050405020304" pitchFamily="18" charset="0"/>
+                </a:defRPr>
+              </a:lvl3pPr>
+              <a:lvl4pPr marL="1600200" indent="-228600">
+                <a:spcBef>
+                  <a:spcPct val="20000"/>
+                </a:spcBef>
+                <a:buChar char="–"/>
+                <a:defRPr sz="2000">
+                  <a:solidFill>
+                    <a:schemeClr val="tx1"/>
+                  </a:solidFill>
+                  <a:latin typeface="Times New Roman" panose="02020603050405020304" pitchFamily="18" charset="0"/>
+                </a:defRPr>
+              </a:lvl4pPr>
+              <a:lvl5pPr marL="2057400" indent="-228600">
+                <a:spcBef>
+                  <a:spcPct val="20000"/>
+                </a:spcBef>
+                <a:buChar char="»"/>
+                <a:defRPr sz="2000">
+                  <a:solidFill>
+                    <a:schemeClr val="tx1"/>
+                  </a:solidFill>
+                  <a:latin typeface="Times New Roman" panose="02020603050405020304" pitchFamily="18" charset="0"/>
+                </a:defRPr>
+              </a:lvl5pPr>
+              <a:lvl6pPr marL="2514600" indent="-228600" eaLnBrk="0" fontAlgn="base" hangingPunct="0">
+                <a:spcBef>
+                  <a:spcPct val="20000"/>
+                </a:spcBef>
+                <a:spcAft>
+                  <a:spcPct val="0"/>
+                </a:spcAft>
+                <a:buChar char="»"/>
+                <a:defRPr sz="2000">
+                  <a:solidFill>
+                    <a:schemeClr val="tx1"/>
+                  </a:solidFill>
+                  <a:latin typeface="Times New Roman" panose="02020603050405020304" pitchFamily="18" charset="0"/>
+                </a:defRPr>
+              </a:lvl6pPr>
+              <a:lvl7pPr marL="2971800" indent="-228600" eaLnBrk="0" fontAlgn="base" hangingPunct="0">
+                <a:spcBef>
+                  <a:spcPct val="20000"/>
+                </a:spcBef>
+                <a:spcAft>
+                  <a:spcPct val="0"/>
+                </a:spcAft>
+                <a:buChar char="»"/>
+                <a:defRPr sz="2000">
+                  <a:solidFill>
+                    <a:schemeClr val="tx1"/>
+                  </a:solidFill>
+                  <a:latin typeface="Times New Roman" panose="02020603050405020304" pitchFamily="18" charset="0"/>
+                </a:defRPr>
+              </a:lvl7pPr>
+              <a:lvl8pPr marL="3429000" indent="-228600" eaLnBrk="0" fontAlgn="base" hangingPunct="0">
+                <a:spcBef>
+                  <a:spcPct val="20000"/>
+                </a:spcBef>
+                <a:spcAft>
+                  <a:spcPct val="0"/>
+                </a:spcAft>
+                <a:buChar char="»"/>
+                <a:defRPr sz="2000">
+                  <a:solidFill>
+                    <a:schemeClr val="tx1"/>
+                  </a:solidFill>
+                  <a:latin typeface="Times New Roman" panose="02020603050405020304" pitchFamily="18" charset="0"/>
+                </a:defRPr>
+              </a:lvl8pPr>
+              <a:lvl9pPr marL="3886200" indent="-228600" eaLnBrk="0" fontAlgn="base" hangingPunct="0">
+                <a:spcBef>
+                  <a:spcPct val="20000"/>
+                </a:spcBef>
+                <a:spcAft>
+                  <a:spcPct val="0"/>
+                </a:spcAft>
+                <a:buChar char="»"/>
+                <a:defRPr sz="2000">
+                  <a:solidFill>
+                    <a:schemeClr val="tx1"/>
+                  </a:solidFill>
+                  <a:latin typeface="Times New Roman" panose="02020603050405020304" pitchFamily="18" charset="0"/>
+                </a:defRPr>
+              </a:lvl9pPr>
+            </a:lstStyle>
+            <a:p>
+              <a:pPr>
+                <a:spcBef>
+                  <a:spcPct val="0"/>
+                </a:spcBef>
+                <a:buFontTx/>
+                <a:buNone/>
+              </a:pPr>
+              <a:r>
+                <a:rPr lang="en-US" altLang="en-US">
+                  <a:solidFill>
+                    <a:srgbClr val="7030A0"/>
+                  </a:solidFill>
+                  <a:latin typeface="Tahoma" panose="020B0604030504040204" pitchFamily="34" charset="0"/>
+                </a:rPr>
+                <a:t>  </a:t>
+              </a:r>
+              <a:r>
+                <a:rPr lang="en-US" altLang="en-US" sz="2000">
+                  <a:solidFill>
+                    <a:srgbClr val="7030A0"/>
+                  </a:solidFill>
+                  <a:latin typeface="Tahoma" panose="020B0604030504040204" pitchFamily="34" charset="0"/>
+                </a:rPr>
+                <a:t> </a:t>
+              </a:r>
+              <a:r>
+                <a:rPr lang="en-US" altLang="en-US">
+                  <a:solidFill>
+                    <a:srgbClr val="7030A0"/>
+                  </a:solidFill>
+                  <a:latin typeface="Tahoma" panose="020B0604030504040204" pitchFamily="34" charset="0"/>
+                </a:rPr>
+                <a:t>  7</a:t>
+              </a:r>
+            </a:p>
+            <a:p>
+              <a:pPr>
+                <a:spcBef>
+                  <a:spcPct val="0"/>
+                </a:spcBef>
+                <a:buFontTx/>
+                <a:buNone/>
+              </a:pPr>
+              <a:r>
+                <a:rPr lang="en-US" altLang="en-US">
+                  <a:solidFill>
+                    <a:srgbClr val="7030A0"/>
+                  </a:solidFill>
+                  <a:latin typeface="Tahoma" panose="020B0604030504040204" pitchFamily="34" charset="0"/>
+                </a:rPr>
+                <a:t>  </a:t>
+              </a:r>
+              <a:r>
+                <a:rPr lang="en-US" altLang="en-US">
+                  <a:solidFill>
+                    <a:schemeClr val="bg2"/>
+                  </a:solidFill>
+                  <a:latin typeface="Tahoma" panose="020B0604030504040204" pitchFamily="34" charset="0"/>
+                </a:rPr>
+                <a:t>/   \</a:t>
+              </a:r>
+            </a:p>
+            <a:p>
+              <a:pPr>
+                <a:spcBef>
+                  <a:spcPct val="0"/>
+                </a:spcBef>
+                <a:buFontTx/>
+                <a:buNone/>
+              </a:pPr>
+              <a:r>
+                <a:rPr lang="en-US" altLang="en-US">
+                  <a:solidFill>
+                    <a:srgbClr val="7030A0"/>
+                  </a:solidFill>
+                  <a:latin typeface="Tahoma" panose="020B0604030504040204" pitchFamily="34" charset="0"/>
+                </a:rPr>
+                <a:t>11   10</a:t>
+              </a:r>
+            </a:p>
+          </p:txBody>
+        </p:sp>
+      </p:grpSp>
+    </p:spTree>
+    <p:extLst>
+      <p:ext uri="{BB962C8B-B14F-4D97-AF65-F5344CB8AC3E}">
+        <p14:creationId xmlns:p14="http://schemas.microsoft.com/office/powerpoint/2010/main" val="3340453131"/>
+      </p:ext>
+    </p:extLst>
+  </p:cSld>
+  <p:clrMapOvr>
+    <a:masterClrMapping/>
+  </p:clrMapOvr>
+</p:sld>
+</file>
+
+<file path=ppt/slides/slide19.xml><?xml version="1.0" encoding="utf-8"?>
+<p:sld xmlns:a="http://schemas.openxmlformats.org/drawingml/2006/main" xmlns:r="http://schemas.openxmlformats.org/officeDocument/2006/relationships" xmlns:p="http://schemas.openxmlformats.org/presentationml/2006/main">
+  <p:cSld>
+    <p:spTree>
+      <p:nvGrpSpPr>
+        <p:cNvPr id="1" name="">
+          <a:extLst>
+            <a:ext uri="{FF2B5EF4-FFF2-40B4-BE49-F238E27FC236}">
+              <a16:creationId xmlns:a16="http://schemas.microsoft.com/office/drawing/2014/main" id="{FC7DB299-A3FD-AE4F-0955-586D2321E876}"/>
+            </a:ext>
+          </a:extLst>
+        </p:cNvPr>
+        <p:cNvGrpSpPr/>
+        <p:nvPr/>
+      </p:nvGrpSpPr>
+      <p:grpSpPr>
+        <a:xfrm>
+          <a:off x="0" y="0"/>
+          <a:ext cx="0" cy="0"/>
+          <a:chOff x="0" y="0"/>
+          <a:chExt cx="0" cy="0"/>
+        </a:xfrm>
+      </p:grpSpPr>
+      <p:sp>
+        <p:nvSpPr>
+          <p:cNvPr id="12292" name="WordArt 5">
+            <a:extLst>
+              <a:ext uri="{FF2B5EF4-FFF2-40B4-BE49-F238E27FC236}">
+                <a16:creationId xmlns:a16="http://schemas.microsoft.com/office/drawing/2014/main" id="{F5527B76-B605-05D1-A0A0-C41B7FFAFEA6}"/>
+              </a:ext>
+            </a:extLst>
+          </p:cNvPr>
+          <p:cNvSpPr>
+            <a:spLocks noGrp="1" noChangeArrowheads="1" noChangeShapeType="1" noTextEdit="1"/>
+          </p:cNvSpPr>
+          <p:nvPr>
+            <p:ph type="title" idx="4294967295"/>
+          </p:nvPr>
+        </p:nvSpPr>
+        <p:spPr bwMode="auto">
+          <a:xfrm>
+            <a:off x="1219200" y="381000"/>
+            <a:ext cx="6477000" cy="914400"/>
+          </a:xfrm>
+          <a:prstGeom prst="rect">
+            <a:avLst/>
+          </a:prstGeom>
+          <a:noFill/>
+          <a:ln>
+            <a:noFill/>
+            <a:prstDash/>
+          </a:ln>
+          <a:effectLst/>
+        </p:spPr>
+        <p:txBody>
+          <a:bodyPr rot="0" spcFirstLastPara="0" vertOverflow="overflow" horzOverflow="overflow" vert="horz" wrap="none" lIns="91440" tIns="45720" rIns="91440" bIns="45720" numCol="1" spcCol="0" rtlCol="0" fromWordArt="1" anchor="t" anchorCtr="0" forceAA="0" compatLnSpc="1">
+            <a:prstTxWarp prst="textPlain">
+              <a:avLst>
+                <a:gd name="adj" fmla="val 50000"/>
+              </a:avLst>
+            </a:prstTxWarp>
+            <a:noAutofit/>
+          </a:bodyPr>
+          <a:lstStyle/>
+          <a:p>
+            <a:pPr marL="0" marR="0" lvl="0" indent="0" algn="ctr" defTabSz="914400" rtl="0" eaLnBrk="0" fontAlgn="base" latinLnBrk="0" hangingPunct="0">
+              <a:lnSpc>
+                <a:spcPct val="100000"/>
+              </a:lnSpc>
+              <a:spcBef>
+                <a:spcPct val="0"/>
+              </a:spcBef>
+              <a:spcAft>
+                <a:spcPct val="0"/>
+              </a:spcAft>
+              <a:buClrTx/>
+              <a:buSzTx/>
+              <a:buFontTx/>
+              <a:buNone/>
+              <a:tabLst/>
+              <a:defRPr/>
+            </a:pPr>
+            <a:r>
+              <a:rPr kumimoji="0" lang="en-US" sz="3600" b="1" i="0" u="none" strike="noStrike" kern="10" cap="none" spc="0" normalizeH="0" baseline="0" noProof="0" dirty="0">
+                <a:ln w="12700">
+                  <a:solidFill>
+                    <a:srgbClr val="EAEAEA"/>
+                  </a:solidFill>
+                  <a:round/>
+                  <a:headEnd/>
+                  <a:tailEnd/>
+                </a:ln>
+                <a:gradFill rotWithShape="1">
+                  <a:gsLst>
+                    <a:gs pos="0">
+                      <a:srgbClr val="A603AB"/>
+                    </a:gs>
+                    <a:gs pos="12000">
+                      <a:srgbClr val="E81766"/>
+                    </a:gs>
+                    <a:gs pos="27000">
+                      <a:srgbClr val="EE3F17"/>
+                    </a:gs>
+                    <a:gs pos="48000">
+                      <a:srgbClr val="FFFF00"/>
+                    </a:gs>
+                    <a:gs pos="64999">
+                      <a:srgbClr val="1A8D48"/>
+                    </a:gs>
+                    <a:gs pos="78999">
+                      <a:srgbClr val="0819FB"/>
+                    </a:gs>
+                    <a:gs pos="100000">
+                      <a:srgbClr val="A603AB"/>
+                    </a:gs>
+                  </a:gsLst>
+                  <a:lin ang="0" scaled="1"/>
+                </a:gradFill>
+                <a:effectLst>
+                  <a:outerShdw dist="35921" dir="2700000" sy="50000" kx="2115830" algn="bl" rotWithShape="0">
+                    <a:srgbClr val="C0C0C0">
+                      <a:alpha val="79999"/>
+                    </a:srgbClr>
+                  </a:outerShdw>
+                </a:effectLst>
+                <a:uLnTx/>
+                <a:uFillTx/>
+                <a:latin typeface="Arial Black" panose="020B0A04020102020204" pitchFamily="34" charset="0"/>
+                <a:ea typeface="+mn-ea"/>
+                <a:cs typeface="+mn-cs"/>
+              </a:rPr>
+              <a:t>remove</a:t>
+            </a:r>
+          </a:p>
+        </p:txBody>
+      </p:sp>
+      <p:sp>
+        <p:nvSpPr>
+          <p:cNvPr id="12291" name="Text Box 2">
+            <a:extLst>
+              <a:ext uri="{FF2B5EF4-FFF2-40B4-BE49-F238E27FC236}">
+                <a16:creationId xmlns:a16="http://schemas.microsoft.com/office/drawing/2014/main" id="{816A0ECA-FA1F-948B-E6E3-541BE2BEC9FD}"/>
+              </a:ext>
+            </a:extLst>
+          </p:cNvPr>
+          <p:cNvSpPr txBox="1">
+            <a:spLocks noChangeArrowheads="1"/>
+          </p:cNvSpPr>
+          <p:nvPr/>
+        </p:nvSpPr>
+        <p:spPr bwMode="auto">
+          <a:xfrm>
+            <a:off x="609600" y="1600200"/>
+            <a:ext cx="8077200" cy="5262979"/>
+          </a:xfrm>
+          <a:prstGeom prst="rect">
+            <a:avLst/>
+          </a:prstGeom>
+          <a:noFill/>
+          <a:ln>
+            <a:noFill/>
+          </a:ln>
+          <a:effectLst/>
+          <a:extLst>
+            <a:ext uri="{909E8E84-426E-40DD-AFC4-6F175D3DCCD1}">
+              <a14:hiddenFill xmlns:a14="http://schemas.microsoft.com/office/drawing/2010/main">
+                <a:solidFill>
+                  <a:schemeClr val="accent1"/>
+                </a:solidFill>
+              </a14:hiddenFill>
+            </a:ext>
+            <a:ext uri="{91240B29-F687-4F45-9708-019B960494DF}">
+              <a14:hiddenLine xmlns:a14="http://schemas.microsoft.com/office/drawing/2010/main" w="9525">
+                <a:solidFill>
+                  <a:schemeClr val="tx1"/>
+                </a:solidFill>
+                <a:miter lim="800000"/>
+                <a:headEnd/>
+                <a:tailEnd/>
+              </a14:hiddenLine>
+            </a:ext>
+            <a:ext uri="{AF507438-7753-43E0-B8FC-AC1667EBCBE1}">
+              <a14:hiddenEffects xmlns:a14="http://schemas.microsoft.com/office/drawing/2010/main">
+                <a:effectLst>
+                  <a:outerShdw dist="35921" dir="2700000" algn="ctr" rotWithShape="0">
+                    <a:schemeClr val="bg2"/>
+                  </a:outerShdw>
+                </a:effectLst>
+              </a14:hiddenEffects>
+            </a:ext>
+          </a:extLst>
+        </p:spPr>
+        <p:txBody>
+          <a:bodyPr>
+            <a:spAutoFit/>
+          </a:bodyPr>
+          <a:lstStyle>
+            <a:lvl1pPr>
+              <a:spcBef>
+                <a:spcPct val="20000"/>
+              </a:spcBef>
+              <a:buChar char="•"/>
+              <a:defRPr sz="3200">
+                <a:solidFill>
+                  <a:schemeClr val="tx1"/>
+                </a:solidFill>
+                <a:latin typeface="Times New Roman" panose="02020603050405020304" pitchFamily="18" charset="0"/>
+              </a:defRPr>
+            </a:lvl1pPr>
+            <a:lvl2pPr marL="742950" indent="-285750">
+              <a:spcBef>
+                <a:spcPct val="20000"/>
+              </a:spcBef>
+              <a:buChar char="–"/>
+              <a:defRPr sz="2800">
+                <a:solidFill>
+                  <a:schemeClr val="tx1"/>
+                </a:solidFill>
+                <a:latin typeface="Times New Roman" panose="02020603050405020304" pitchFamily="18" charset="0"/>
+              </a:defRPr>
+            </a:lvl2pPr>
+            <a:lvl3pPr marL="1143000" indent="-228600">
+              <a:spcBef>
+                <a:spcPct val="20000"/>
+              </a:spcBef>
+              <a:buChar char="•"/>
+              <a:defRPr sz="2400">
+                <a:solidFill>
+                  <a:schemeClr val="tx1"/>
+                </a:solidFill>
+                <a:latin typeface="Times New Roman" panose="02020603050405020304" pitchFamily="18" charset="0"/>
+              </a:defRPr>
+            </a:lvl3pPr>
+            <a:lvl4pPr marL="1600200" indent="-228600">
+              <a:spcBef>
+                <a:spcPct val="20000"/>
+              </a:spcBef>
+              <a:buChar char="–"/>
+              <a:defRPr sz="2000">
+                <a:solidFill>
+                  <a:schemeClr val="tx1"/>
+                </a:solidFill>
+                <a:latin typeface="Times New Roman" panose="02020603050405020304" pitchFamily="18" charset="0"/>
+              </a:defRPr>
+            </a:lvl4pPr>
+            <a:lvl5pPr marL="2057400" indent="-228600">
+              <a:spcBef>
+                <a:spcPct val="20000"/>
+              </a:spcBef>
+              <a:buChar char="»"/>
+              <a:defRPr sz="2000">
+                <a:solidFill>
+                  <a:schemeClr val="tx1"/>
+                </a:solidFill>
+                <a:latin typeface="Times New Roman" panose="02020603050405020304" pitchFamily="18" charset="0"/>
+              </a:defRPr>
+            </a:lvl5pPr>
+            <a:lvl6pPr marL="2514600" indent="-228600" eaLnBrk="0" fontAlgn="base" hangingPunct="0">
+              <a:spcBef>
+                <a:spcPct val="20000"/>
+              </a:spcBef>
+              <a:spcAft>
+                <a:spcPct val="0"/>
+              </a:spcAft>
+              <a:buChar char="»"/>
+              <a:defRPr sz="2000">
+                <a:solidFill>
+                  <a:schemeClr val="tx1"/>
+                </a:solidFill>
+                <a:latin typeface="Times New Roman" panose="02020603050405020304" pitchFamily="18" charset="0"/>
+              </a:defRPr>
+            </a:lvl6pPr>
+            <a:lvl7pPr marL="2971800" indent="-228600" eaLnBrk="0" fontAlgn="base" hangingPunct="0">
+              <a:spcBef>
+                <a:spcPct val="20000"/>
+              </a:spcBef>
+              <a:spcAft>
+                <a:spcPct val="0"/>
+              </a:spcAft>
+              <a:buChar char="»"/>
+              <a:defRPr sz="2000">
+                <a:solidFill>
+                  <a:schemeClr val="tx1"/>
+                </a:solidFill>
+                <a:latin typeface="Times New Roman" panose="02020603050405020304" pitchFamily="18" charset="0"/>
+              </a:defRPr>
+            </a:lvl7pPr>
+            <a:lvl8pPr marL="3429000" indent="-228600" eaLnBrk="0" fontAlgn="base" hangingPunct="0">
+              <a:spcBef>
+                <a:spcPct val="20000"/>
+              </a:spcBef>
+              <a:spcAft>
+                <a:spcPct val="0"/>
+              </a:spcAft>
+              <a:buChar char="»"/>
+              <a:defRPr sz="2000">
+                <a:solidFill>
+                  <a:schemeClr val="tx1"/>
+                </a:solidFill>
+                <a:latin typeface="Times New Roman" panose="02020603050405020304" pitchFamily="18" charset="0"/>
+              </a:defRPr>
+            </a:lvl8pPr>
+            <a:lvl9pPr marL="3886200" indent="-228600" eaLnBrk="0" fontAlgn="base" hangingPunct="0">
+              <a:spcBef>
+                <a:spcPct val="20000"/>
+              </a:spcBef>
+              <a:spcAft>
+                <a:spcPct val="0"/>
+              </a:spcAft>
+              <a:buChar char="»"/>
+              <a:defRPr sz="2000">
+                <a:solidFill>
+                  <a:schemeClr val="tx1"/>
+                </a:solidFill>
+                <a:latin typeface="Times New Roman" panose="02020603050405020304" pitchFamily="18" charset="0"/>
+              </a:defRPr>
+            </a:lvl9pPr>
+          </a:lstStyle>
+          <a:p>
+            <a:pPr>
+              <a:spcBef>
+                <a:spcPct val="0"/>
+              </a:spcBef>
+              <a:buFontTx/>
+              <a:buNone/>
+            </a:pPr>
+            <a:r>
+              <a:rPr lang="en-US" altLang="en-US" sz="2800" dirty="0" err="1">
+                <a:latin typeface="Tahoma" panose="020B0604030504040204" pitchFamily="34" charset="0"/>
+              </a:rPr>
+              <a:t>PriorityQueue</a:t>
+            </a:r>
+            <a:r>
+              <a:rPr lang="en-US" altLang="en-US" sz="2800" dirty="0">
+                <a:latin typeface="Tahoma" panose="020B0604030504040204" pitchFamily="34" charset="0"/>
+              </a:rPr>
+              <a:t>&lt;Integer&gt; </a:t>
+            </a:r>
+            <a:r>
+              <a:rPr lang="en-US" altLang="en-US" sz="2800" dirty="0" err="1">
+                <a:latin typeface="Tahoma" panose="020B0604030504040204" pitchFamily="34" charset="0"/>
+              </a:rPr>
+              <a:t>pQueue</a:t>
+            </a:r>
+            <a:r>
+              <a:rPr lang="en-US" altLang="en-US" sz="2800" dirty="0">
+                <a:latin typeface="Tahoma" panose="020B0604030504040204" pitchFamily="34" charset="0"/>
+              </a:rPr>
+              <a:t>;</a:t>
+            </a:r>
+          </a:p>
+          <a:p>
+            <a:pPr>
+              <a:spcBef>
+                <a:spcPct val="0"/>
+              </a:spcBef>
+              <a:buFontTx/>
+              <a:buNone/>
+            </a:pPr>
+            <a:r>
+              <a:rPr lang="en-US" altLang="en-US" sz="2800" dirty="0" err="1">
+                <a:latin typeface="Tahoma" panose="020B0604030504040204" pitchFamily="34" charset="0"/>
+              </a:rPr>
+              <a:t>pQueue</a:t>
+            </a:r>
+            <a:r>
+              <a:rPr lang="en-US" altLang="en-US" sz="2800" dirty="0">
+                <a:latin typeface="Tahoma" panose="020B0604030504040204" pitchFamily="34" charset="0"/>
+              </a:rPr>
+              <a:t> = new </a:t>
+            </a:r>
+            <a:r>
+              <a:rPr lang="en-US" altLang="en-US" sz="2800" dirty="0" err="1">
+                <a:latin typeface="Tahoma" panose="020B0604030504040204" pitchFamily="34" charset="0"/>
+              </a:rPr>
+              <a:t>PriorityQueue</a:t>
+            </a:r>
+            <a:r>
+              <a:rPr lang="en-US" altLang="en-US" sz="2800" dirty="0">
+                <a:latin typeface="Tahoma" panose="020B0604030504040204" pitchFamily="34" charset="0"/>
+              </a:rPr>
+              <a:t>&lt;&gt;();</a:t>
+            </a:r>
+            <a:br>
+              <a:rPr lang="en-US" altLang="en-US" sz="2800" dirty="0">
+                <a:latin typeface="Tahoma" panose="020B0604030504040204" pitchFamily="34" charset="0"/>
+              </a:rPr>
+            </a:br>
+            <a:endParaRPr lang="en-US" altLang="en-US" sz="2800" dirty="0">
+              <a:latin typeface="Tahoma" panose="020B0604030504040204" pitchFamily="34" charset="0"/>
+            </a:endParaRPr>
+          </a:p>
+          <a:p>
+            <a:pPr>
+              <a:spcBef>
+                <a:spcPct val="0"/>
+              </a:spcBef>
+              <a:buFontTx/>
+              <a:buNone/>
+            </a:pPr>
+            <a:r>
+              <a:rPr lang="en-US" altLang="en-US" sz="2800" dirty="0" err="1">
+                <a:latin typeface="Tahoma" panose="020B0604030504040204" pitchFamily="34" charset="0"/>
+              </a:rPr>
+              <a:t>pQueue.offer</a:t>
+            </a:r>
+            <a:r>
+              <a:rPr lang="en-US" altLang="en-US" sz="2800" dirty="0">
+                <a:latin typeface="Tahoma" panose="020B0604030504040204" pitchFamily="34" charset="0"/>
+              </a:rPr>
+              <a:t>(11);</a:t>
+            </a:r>
+          </a:p>
+          <a:p>
+            <a:pPr>
+              <a:spcBef>
+                <a:spcPct val="0"/>
+              </a:spcBef>
+              <a:buFontTx/>
+              <a:buNone/>
+            </a:pPr>
+            <a:r>
+              <a:rPr lang="en-US" altLang="en-US" sz="2800" dirty="0" err="1">
+                <a:latin typeface="Tahoma" panose="020B0604030504040204" pitchFamily="34" charset="0"/>
+              </a:rPr>
+              <a:t>pQueue.offer</a:t>
+            </a:r>
+            <a:r>
+              <a:rPr lang="en-US" altLang="en-US" sz="2800" dirty="0">
+                <a:latin typeface="Tahoma" panose="020B0604030504040204" pitchFamily="34" charset="0"/>
+              </a:rPr>
+              <a:t>(10);</a:t>
+            </a:r>
+          </a:p>
+          <a:p>
+            <a:pPr>
+              <a:spcBef>
+                <a:spcPct val="0"/>
+              </a:spcBef>
+              <a:buFontTx/>
+              <a:buNone/>
+            </a:pPr>
+            <a:r>
+              <a:rPr lang="en-US" altLang="en-US" sz="2800" dirty="0" err="1">
+                <a:latin typeface="Tahoma" panose="020B0604030504040204" pitchFamily="34" charset="0"/>
+              </a:rPr>
+              <a:t>pQueue.offer</a:t>
+            </a:r>
+            <a:r>
+              <a:rPr lang="en-US" altLang="en-US" sz="2800" dirty="0">
+                <a:latin typeface="Tahoma" panose="020B0604030504040204" pitchFamily="34" charset="0"/>
+              </a:rPr>
+              <a:t>(7);</a:t>
+            </a:r>
+          </a:p>
+          <a:p>
+            <a:pPr>
+              <a:spcBef>
+                <a:spcPct val="0"/>
+              </a:spcBef>
+              <a:buFontTx/>
+              <a:buNone/>
+            </a:pPr>
+            <a:r>
+              <a:rPr lang="en-US" altLang="en-US" sz="2800" dirty="0" err="1">
+                <a:latin typeface="Tahoma" panose="020B0604030504040204" pitchFamily="34" charset="0"/>
+              </a:rPr>
+              <a:t>out.println</a:t>
+            </a:r>
+            <a:r>
+              <a:rPr lang="en-US" altLang="en-US" sz="2800" dirty="0">
+                <a:latin typeface="Tahoma" panose="020B0604030504040204" pitchFamily="34" charset="0"/>
+              </a:rPr>
+              <a:t>(</a:t>
+            </a:r>
+            <a:r>
+              <a:rPr lang="en-US" altLang="en-US" sz="2800" dirty="0" err="1">
+                <a:latin typeface="Tahoma" panose="020B0604030504040204" pitchFamily="34" charset="0"/>
+              </a:rPr>
+              <a:t>pQueue</a:t>
+            </a:r>
+            <a:r>
+              <a:rPr lang="en-US" altLang="en-US" sz="2800" dirty="0">
+                <a:latin typeface="Tahoma" panose="020B0604030504040204" pitchFamily="34" charset="0"/>
+              </a:rPr>
+              <a:t>); </a:t>
+            </a:r>
+            <a:r>
+              <a:rPr lang="en-US" altLang="en-US" sz="2800" dirty="0" err="1">
+                <a:latin typeface="Tahoma" panose="020B0604030504040204" pitchFamily="34" charset="0"/>
+              </a:rPr>
+              <a:t>out.println</a:t>
+            </a:r>
+            <a:r>
+              <a:rPr lang="en-US" altLang="en-US" sz="2800" dirty="0">
+                <a:latin typeface="Tahoma" panose="020B0604030504040204" pitchFamily="34" charset="0"/>
+              </a:rPr>
+              <a:t>(</a:t>
+            </a:r>
+            <a:r>
+              <a:rPr lang="en-US" altLang="en-US" sz="2800" dirty="0" err="1">
+                <a:latin typeface="Tahoma" panose="020B0604030504040204" pitchFamily="34" charset="0"/>
+              </a:rPr>
+              <a:t>pQueue.poll</a:t>
+            </a:r>
+            <a:r>
+              <a:rPr lang="en-US" altLang="en-US" sz="2800" dirty="0">
+                <a:latin typeface="Tahoma" panose="020B0604030504040204" pitchFamily="34" charset="0"/>
+              </a:rPr>
+              <a:t>());</a:t>
+            </a:r>
+          </a:p>
+          <a:p>
+            <a:pPr>
+              <a:spcBef>
+                <a:spcPct val="0"/>
+              </a:spcBef>
+              <a:buNone/>
+            </a:pPr>
+            <a:r>
+              <a:rPr lang="en-US" altLang="en-US" sz="2800" dirty="0" err="1">
+                <a:latin typeface="Tahoma" panose="020B0604030504040204" pitchFamily="34" charset="0"/>
+              </a:rPr>
+              <a:t>out.println</a:t>
+            </a:r>
+            <a:r>
+              <a:rPr lang="en-US" altLang="en-US" sz="2800" dirty="0">
+                <a:latin typeface="Tahoma" panose="020B0604030504040204" pitchFamily="34" charset="0"/>
+              </a:rPr>
+              <a:t>(</a:t>
+            </a:r>
+            <a:r>
+              <a:rPr lang="en-US" altLang="en-US" sz="2800" dirty="0" err="1">
+                <a:latin typeface="Tahoma" panose="020B0604030504040204" pitchFamily="34" charset="0"/>
+              </a:rPr>
+              <a:t>pQueue.peek</a:t>
+            </a:r>
+            <a:r>
+              <a:rPr lang="en-US" altLang="en-US" sz="2800" dirty="0">
+                <a:latin typeface="Tahoma" panose="020B0604030504040204" pitchFamily="34" charset="0"/>
+              </a:rPr>
+              <a:t>());</a:t>
+            </a:r>
+          </a:p>
+          <a:p>
+            <a:pPr>
+              <a:spcBef>
+                <a:spcPct val="0"/>
+              </a:spcBef>
+              <a:buFontTx/>
+              <a:buNone/>
+            </a:pPr>
+            <a:r>
+              <a:rPr lang="en-US" altLang="en-US" sz="2800" dirty="0" err="1">
+                <a:latin typeface="Tahoma" panose="020B0604030504040204" pitchFamily="34" charset="0"/>
+              </a:rPr>
+              <a:t>out.println</a:t>
+            </a:r>
+            <a:r>
+              <a:rPr lang="en-US" altLang="en-US" sz="2800" dirty="0">
+                <a:latin typeface="Tahoma" panose="020B0604030504040204" pitchFamily="34" charset="0"/>
+              </a:rPr>
+              <a:t>(</a:t>
+            </a:r>
+            <a:r>
+              <a:rPr lang="en-US" altLang="en-US" sz="2800" dirty="0" err="1">
+                <a:latin typeface="Tahoma" panose="020B0604030504040204" pitchFamily="34" charset="0"/>
+              </a:rPr>
+              <a:t>pQueue</a:t>
+            </a:r>
+            <a:r>
+              <a:rPr lang="en-US" altLang="en-US" sz="2800" dirty="0">
+                <a:latin typeface="Tahoma" panose="020B0604030504040204" pitchFamily="34" charset="0"/>
+              </a:rPr>
+              <a:t>);</a:t>
+            </a:r>
+          </a:p>
+          <a:p>
+            <a:pPr>
+              <a:spcBef>
+                <a:spcPct val="0"/>
+              </a:spcBef>
+              <a:buFontTx/>
+              <a:buNone/>
+            </a:pPr>
+            <a:endParaRPr lang="en-US" altLang="en-US" sz="2800" dirty="0">
+              <a:latin typeface="Tahoma" panose="020B0604030504040204" pitchFamily="34" charset="0"/>
+            </a:endParaRPr>
+          </a:p>
+          <a:p>
+            <a:pPr>
+              <a:spcBef>
+                <a:spcPct val="0"/>
+              </a:spcBef>
+              <a:buFontTx/>
+              <a:buNone/>
+            </a:pPr>
+            <a:endParaRPr lang="en-US" altLang="en-US" sz="2800" dirty="0">
+              <a:latin typeface="Tahoma" panose="020B0604030504040204" pitchFamily="34" charset="0"/>
+            </a:endParaRPr>
+          </a:p>
+        </p:txBody>
+      </p:sp>
+      <p:sp>
+        <p:nvSpPr>
+          <p:cNvPr id="12293" name="Text Box 6">
+            <a:extLst>
+              <a:ext uri="{FF2B5EF4-FFF2-40B4-BE49-F238E27FC236}">
+                <a16:creationId xmlns:a16="http://schemas.microsoft.com/office/drawing/2014/main" id="{F9C42337-D10B-F239-D91F-2F75A114A7CB}"/>
+              </a:ext>
+            </a:extLst>
+          </p:cNvPr>
+          <p:cNvSpPr txBox="1">
+            <a:spLocks noChangeArrowheads="1"/>
+          </p:cNvSpPr>
+          <p:nvPr/>
+        </p:nvSpPr>
+        <p:spPr bwMode="auto">
+          <a:xfrm>
+            <a:off x="6553200" y="3302001"/>
+            <a:ext cx="2362200" cy="2800767"/>
+          </a:xfrm>
+          <a:prstGeom prst="rect">
+            <a:avLst/>
+          </a:prstGeom>
+          <a:noFill/>
+          <a:ln w="12700">
+            <a:solidFill>
+              <a:srgbClr val="993300"/>
+            </a:solidFill>
+            <a:miter lim="800000"/>
+            <a:headEnd type="none" w="sm" len="sm"/>
+            <a:tailEnd type="none" w="sm" len="sm"/>
+          </a:ln>
+          <a:effectLst/>
+          <a:extLst>
+            <a:ext uri="{909E8E84-426E-40DD-AFC4-6F175D3DCCD1}">
+              <a14:hiddenFill xmlns:a14="http://schemas.microsoft.com/office/drawing/2010/main">
+                <a:solidFill>
+                  <a:schemeClr val="accent1"/>
+                </a:solidFill>
+              </a14:hiddenFill>
+            </a:ext>
+            <a:ext uri="{AF507438-7753-43E0-B8FC-AC1667EBCBE1}">
+              <a14:hiddenEffects xmlns:a14="http://schemas.microsoft.com/office/drawing/2010/main">
+                <a:effectLst>
+                  <a:outerShdw dist="35921" dir="2700000" algn="ctr" rotWithShape="0">
+                    <a:schemeClr val="bg2"/>
+                  </a:outerShdw>
+                </a:effectLst>
+              </a14:hiddenEffects>
+            </a:ext>
+          </a:extLst>
+        </p:spPr>
+        <p:txBody>
+          <a:bodyPr>
+            <a:spAutoFit/>
+          </a:bodyPr>
+          <a:lstStyle>
+            <a:lvl1pPr>
+              <a:spcBef>
+                <a:spcPct val="20000"/>
+              </a:spcBef>
+              <a:buChar char="•"/>
+              <a:defRPr sz="3200">
+                <a:solidFill>
+                  <a:schemeClr val="tx1"/>
+                </a:solidFill>
+                <a:latin typeface="Times New Roman" panose="02020603050405020304" pitchFamily="18" charset="0"/>
+              </a:defRPr>
+            </a:lvl1pPr>
+            <a:lvl2pPr marL="742950" indent="-285750">
+              <a:spcBef>
+                <a:spcPct val="20000"/>
+              </a:spcBef>
+              <a:buChar char="–"/>
+              <a:defRPr sz="2800">
+                <a:solidFill>
+                  <a:schemeClr val="tx1"/>
+                </a:solidFill>
+                <a:latin typeface="Times New Roman" panose="02020603050405020304" pitchFamily="18" charset="0"/>
+              </a:defRPr>
+            </a:lvl2pPr>
+            <a:lvl3pPr marL="1143000" indent="-228600">
+              <a:spcBef>
+                <a:spcPct val="20000"/>
+              </a:spcBef>
+              <a:buChar char="•"/>
+              <a:defRPr sz="2400">
+                <a:solidFill>
+                  <a:schemeClr val="tx1"/>
+                </a:solidFill>
+                <a:latin typeface="Times New Roman" panose="02020603050405020304" pitchFamily="18" charset="0"/>
+              </a:defRPr>
+            </a:lvl3pPr>
+            <a:lvl4pPr marL="1600200" indent="-228600">
+              <a:spcBef>
+                <a:spcPct val="20000"/>
+              </a:spcBef>
+              <a:buChar char="–"/>
+              <a:defRPr sz="2000">
+                <a:solidFill>
+                  <a:schemeClr val="tx1"/>
+                </a:solidFill>
+                <a:latin typeface="Times New Roman" panose="02020603050405020304" pitchFamily="18" charset="0"/>
+              </a:defRPr>
+            </a:lvl4pPr>
+            <a:lvl5pPr marL="2057400" indent="-228600">
+              <a:spcBef>
+                <a:spcPct val="20000"/>
+              </a:spcBef>
+              <a:buChar char="»"/>
+              <a:defRPr sz="2000">
+                <a:solidFill>
+                  <a:schemeClr val="tx1"/>
+                </a:solidFill>
+                <a:latin typeface="Times New Roman" panose="02020603050405020304" pitchFamily="18" charset="0"/>
+              </a:defRPr>
+            </a:lvl5pPr>
+            <a:lvl6pPr marL="2514600" indent="-228600" eaLnBrk="0" fontAlgn="base" hangingPunct="0">
+              <a:spcBef>
+                <a:spcPct val="20000"/>
+              </a:spcBef>
+              <a:spcAft>
+                <a:spcPct val="0"/>
+              </a:spcAft>
+              <a:buChar char="»"/>
+              <a:defRPr sz="2000">
+                <a:solidFill>
+                  <a:schemeClr val="tx1"/>
+                </a:solidFill>
+                <a:latin typeface="Times New Roman" panose="02020603050405020304" pitchFamily="18" charset="0"/>
+              </a:defRPr>
+            </a:lvl6pPr>
+            <a:lvl7pPr marL="2971800" indent="-228600" eaLnBrk="0" fontAlgn="base" hangingPunct="0">
+              <a:spcBef>
+                <a:spcPct val="20000"/>
+              </a:spcBef>
+              <a:spcAft>
+                <a:spcPct val="0"/>
+              </a:spcAft>
+              <a:buChar char="»"/>
+              <a:defRPr sz="2000">
+                <a:solidFill>
+                  <a:schemeClr val="tx1"/>
+                </a:solidFill>
+                <a:latin typeface="Times New Roman" panose="02020603050405020304" pitchFamily="18" charset="0"/>
+              </a:defRPr>
+            </a:lvl7pPr>
+            <a:lvl8pPr marL="3429000" indent="-228600" eaLnBrk="0" fontAlgn="base" hangingPunct="0">
+              <a:spcBef>
+                <a:spcPct val="20000"/>
+              </a:spcBef>
+              <a:spcAft>
+                <a:spcPct val="0"/>
+              </a:spcAft>
+              <a:buChar char="»"/>
+              <a:defRPr sz="2000">
+                <a:solidFill>
+                  <a:schemeClr val="tx1"/>
+                </a:solidFill>
+                <a:latin typeface="Times New Roman" panose="02020603050405020304" pitchFamily="18" charset="0"/>
+              </a:defRPr>
+            </a:lvl8pPr>
+            <a:lvl9pPr marL="3886200" indent="-228600" eaLnBrk="0" fontAlgn="base" hangingPunct="0">
+              <a:spcBef>
+                <a:spcPct val="20000"/>
+              </a:spcBef>
+              <a:spcAft>
+                <a:spcPct val="0"/>
+              </a:spcAft>
+              <a:buChar char="»"/>
+              <a:defRPr sz="2000">
+                <a:solidFill>
+                  <a:schemeClr val="tx1"/>
+                </a:solidFill>
+                <a:latin typeface="Times New Roman" panose="02020603050405020304" pitchFamily="18" charset="0"/>
+              </a:defRPr>
+            </a:lvl9pPr>
+          </a:lstStyle>
+          <a:p>
+            <a:pPr>
+              <a:spcBef>
+                <a:spcPct val="50000"/>
+              </a:spcBef>
+              <a:buFontTx/>
+              <a:buNone/>
+            </a:pPr>
+            <a:r>
+              <a:rPr lang="en-US" altLang="en-US" u="sng" dirty="0">
+                <a:solidFill>
+                  <a:srgbClr val="FF0000"/>
+                </a:solidFill>
+                <a:latin typeface="Tahoma" panose="020B0604030504040204" pitchFamily="34" charset="0"/>
+              </a:rPr>
+              <a:t>OUTPUT</a:t>
+            </a:r>
+          </a:p>
+          <a:p>
+            <a:pPr>
+              <a:spcBef>
+                <a:spcPct val="50000"/>
+              </a:spcBef>
+              <a:buFontTx/>
+              <a:buNone/>
+            </a:pPr>
+            <a:r>
+              <a:rPr lang="en-US" altLang="en-US" dirty="0">
+                <a:latin typeface="Tahoma" panose="020B0604030504040204" pitchFamily="34" charset="0"/>
+              </a:rPr>
+              <a:t>[7, 11, 10]</a:t>
+            </a:r>
+            <a:br>
+              <a:rPr lang="en-US" altLang="en-US" dirty="0">
+                <a:latin typeface="Tahoma" panose="020B0604030504040204" pitchFamily="34" charset="0"/>
+              </a:rPr>
+            </a:br>
+            <a:r>
+              <a:rPr lang="en-US" altLang="en-US" dirty="0">
+                <a:latin typeface="Tahoma" panose="020B0604030504040204" pitchFamily="34" charset="0"/>
+              </a:rPr>
+              <a:t>7</a:t>
+            </a:r>
+            <a:br>
+              <a:rPr lang="en-US" altLang="en-US" dirty="0">
+                <a:latin typeface="Tahoma" panose="020B0604030504040204" pitchFamily="34" charset="0"/>
+              </a:rPr>
+            </a:br>
+            <a:r>
+              <a:rPr lang="en-US" altLang="en-US" dirty="0">
+                <a:latin typeface="Tahoma" panose="020B0604030504040204" pitchFamily="34" charset="0"/>
+              </a:rPr>
+              <a:t>10</a:t>
+            </a:r>
+            <a:br>
+              <a:rPr lang="en-US" altLang="en-US" dirty="0">
+                <a:latin typeface="Tahoma" panose="020B0604030504040204" pitchFamily="34" charset="0"/>
+              </a:rPr>
+            </a:br>
+            <a:r>
+              <a:rPr lang="en-US" altLang="en-US" dirty="0">
+                <a:latin typeface="Tahoma" panose="020B0604030504040204" pitchFamily="34" charset="0"/>
+              </a:rPr>
+              <a:t>[10, 11]</a:t>
+            </a:r>
+          </a:p>
+        </p:txBody>
+      </p:sp>
+      <p:sp>
+        <p:nvSpPr>
+          <p:cNvPr id="12290" name="Footer Placeholder 3">
+            <a:extLst>
+              <a:ext uri="{FF2B5EF4-FFF2-40B4-BE49-F238E27FC236}">
+                <a16:creationId xmlns:a16="http://schemas.microsoft.com/office/drawing/2014/main" id="{DD1F5556-3F6F-7627-36BE-BCA506C5B4A8}"/>
+              </a:ext>
+              <a:ext uri="{C183D7F6-B498-43B3-948B-1728B52AA6E4}">
+                <adec:decorative xmlns:adec="http://schemas.microsoft.com/office/drawing/2017/decorative" val="1"/>
+              </a:ext>
+            </a:extLst>
+          </p:cNvPr>
+          <p:cNvSpPr>
+            <a:spLocks noGrp="1"/>
+          </p:cNvSpPr>
+          <p:nvPr>
+            <p:ph type="ftr" sz="quarter" idx="12"/>
+          </p:nvPr>
+        </p:nvSpPr>
+        <p:spPr>
+          <a:noFill/>
+        </p:spPr>
+        <p:txBody>
+          <a:bodyPr/>
+          <a:lstStyle>
+            <a:lvl1pPr>
+              <a:spcBef>
+                <a:spcPct val="20000"/>
+              </a:spcBef>
+              <a:buChar char="•"/>
+              <a:defRPr sz="3200">
+                <a:solidFill>
+                  <a:schemeClr val="tx1"/>
+                </a:solidFill>
+                <a:latin typeface="Times New Roman" panose="02020603050405020304" pitchFamily="18" charset="0"/>
+              </a:defRPr>
+            </a:lvl1pPr>
+            <a:lvl2pPr marL="742950" indent="-285750">
+              <a:spcBef>
+                <a:spcPct val="20000"/>
+              </a:spcBef>
+              <a:buChar char="–"/>
+              <a:defRPr sz="2800">
+                <a:solidFill>
+                  <a:schemeClr val="tx1"/>
+                </a:solidFill>
+                <a:latin typeface="Times New Roman" panose="02020603050405020304" pitchFamily="18" charset="0"/>
+              </a:defRPr>
+            </a:lvl2pPr>
+            <a:lvl3pPr marL="1143000" indent="-228600">
+              <a:spcBef>
+                <a:spcPct val="20000"/>
+              </a:spcBef>
+              <a:buChar char="•"/>
+              <a:defRPr sz="2400">
+                <a:solidFill>
+                  <a:schemeClr val="tx1"/>
+                </a:solidFill>
+                <a:latin typeface="Times New Roman" panose="02020603050405020304" pitchFamily="18" charset="0"/>
+              </a:defRPr>
+            </a:lvl3pPr>
+            <a:lvl4pPr marL="1600200" indent="-228600">
+              <a:spcBef>
+                <a:spcPct val="20000"/>
+              </a:spcBef>
+              <a:buChar char="–"/>
+              <a:defRPr sz="2000">
+                <a:solidFill>
+                  <a:schemeClr val="tx1"/>
+                </a:solidFill>
+                <a:latin typeface="Times New Roman" panose="02020603050405020304" pitchFamily="18" charset="0"/>
+              </a:defRPr>
+            </a:lvl4pPr>
+            <a:lvl5pPr marL="2057400" indent="-228600">
+              <a:spcBef>
+                <a:spcPct val="20000"/>
+              </a:spcBef>
+              <a:buChar char="»"/>
+              <a:defRPr sz="2000">
+                <a:solidFill>
+                  <a:schemeClr val="tx1"/>
+                </a:solidFill>
+                <a:latin typeface="Times New Roman" panose="02020603050405020304" pitchFamily="18" charset="0"/>
+              </a:defRPr>
+            </a:lvl5pPr>
+            <a:lvl6pPr marL="2514600" indent="-228600" eaLnBrk="0" fontAlgn="base" hangingPunct="0">
+              <a:spcBef>
+                <a:spcPct val="20000"/>
+              </a:spcBef>
+              <a:spcAft>
+                <a:spcPct val="0"/>
+              </a:spcAft>
+              <a:buChar char="»"/>
+              <a:defRPr sz="2000">
+                <a:solidFill>
+                  <a:schemeClr val="tx1"/>
+                </a:solidFill>
+                <a:latin typeface="Times New Roman" panose="02020603050405020304" pitchFamily="18" charset="0"/>
+              </a:defRPr>
+            </a:lvl6pPr>
+            <a:lvl7pPr marL="2971800" indent="-228600" eaLnBrk="0" fontAlgn="base" hangingPunct="0">
+              <a:spcBef>
+                <a:spcPct val="20000"/>
+              </a:spcBef>
+              <a:spcAft>
+                <a:spcPct val="0"/>
+              </a:spcAft>
+              <a:buChar char="»"/>
+              <a:defRPr sz="2000">
+                <a:solidFill>
+                  <a:schemeClr val="tx1"/>
+                </a:solidFill>
+                <a:latin typeface="Times New Roman" panose="02020603050405020304" pitchFamily="18" charset="0"/>
+              </a:defRPr>
+            </a:lvl7pPr>
+            <a:lvl8pPr marL="3429000" indent="-228600" eaLnBrk="0" fontAlgn="base" hangingPunct="0">
+              <a:spcBef>
+                <a:spcPct val="20000"/>
+              </a:spcBef>
+              <a:spcAft>
+                <a:spcPct val="0"/>
+              </a:spcAft>
+              <a:buChar char="»"/>
+              <a:defRPr sz="2000">
+                <a:solidFill>
+                  <a:schemeClr val="tx1"/>
+                </a:solidFill>
+                <a:latin typeface="Times New Roman" panose="02020603050405020304" pitchFamily="18" charset="0"/>
+              </a:defRPr>
+            </a:lvl8pPr>
+            <a:lvl9pPr marL="3886200" indent="-228600" eaLnBrk="0" fontAlgn="base" hangingPunct="0">
+              <a:spcBef>
+                <a:spcPct val="20000"/>
+              </a:spcBef>
+              <a:spcAft>
+                <a:spcPct val="0"/>
+              </a:spcAft>
+              <a:buChar char="»"/>
+              <a:defRPr sz="2000">
+                <a:solidFill>
+                  <a:schemeClr val="tx1"/>
+                </a:solidFill>
+                <a:latin typeface="Times New Roman" panose="02020603050405020304" pitchFamily="18" charset="0"/>
+              </a:defRPr>
+            </a:lvl9pPr>
+          </a:lstStyle>
+          <a:p>
+            <a:pPr>
+              <a:spcBef>
+                <a:spcPct val="0"/>
+              </a:spcBef>
+              <a:buFontTx/>
+              <a:buNone/>
+            </a:pPr>
+            <a:endParaRPr lang="en-US" altLang="en-US" sz="800" b="1"/>
+          </a:p>
+          <a:p>
+            <a:pPr>
+              <a:spcBef>
+                <a:spcPct val="0"/>
+              </a:spcBef>
+              <a:buFontTx/>
+              <a:buNone/>
+            </a:pPr>
+            <a:endParaRPr lang="en-US" altLang="en-US" sz="800">
+              <a:latin typeface="Tahoma" panose="020B0604030504040204" pitchFamily="34" charset="0"/>
+            </a:endParaRPr>
+          </a:p>
+          <a:p>
+            <a:pPr>
+              <a:spcBef>
+                <a:spcPct val="0"/>
+              </a:spcBef>
+              <a:buFontTx/>
+              <a:buNone/>
+            </a:pPr>
+            <a:endParaRPr lang="en-US" altLang="en-US" sz="800" b="1">
+              <a:latin typeface="Tahoma" panose="020B0604030504040204" pitchFamily="34" charset="0"/>
+            </a:endParaRPr>
+          </a:p>
+          <a:p>
+            <a:pPr>
+              <a:spcBef>
+                <a:spcPct val="0"/>
+              </a:spcBef>
+              <a:buFontTx/>
+              <a:buNone/>
+            </a:pPr>
+            <a:r>
+              <a:rPr lang="en-US" altLang="en-US" sz="800" b="1">
+                <a:latin typeface="Tahoma" panose="020B0604030504040204" pitchFamily="34" charset="0"/>
+              </a:rPr>
+              <a:t>© A+ Computer Science  -  www.apluscompsci.com</a:t>
+            </a:r>
+          </a:p>
+        </p:txBody>
+      </p:sp>
+    </p:spTree>
+    <p:extLst>
+      <p:ext uri="{BB962C8B-B14F-4D97-AF65-F5344CB8AC3E}">
+        <p14:creationId xmlns:p14="http://schemas.microsoft.com/office/powerpoint/2010/main" val="3435686740"/>
+      </p:ext>
+    </p:extLst>
+  </p:cSld>
+  <p:clrMapOvr>
+    <a:masterClrMapping/>
+  </p:clrMapOvr>
+</p:sld>
+</file>
+
 <file path=ppt/slides/slide2.xml><?xml version="1.0" encoding="utf-8"?>
 <p:sld xmlns:a="http://schemas.openxmlformats.org/drawingml/2006/main" xmlns:r="http://schemas.openxmlformats.org/officeDocument/2006/relationships" xmlns:p="http://schemas.openxmlformats.org/presentationml/2006/main">
   <p:cSld>
@@ -14527,6 +18022,1075 @@
         </p:txBody>
       </p:sp>
     </p:spTree>
+  </p:cSld>
+  <p:clrMapOvr>
+    <a:masterClrMapping/>
+  </p:clrMapOvr>
+</p:sld>
+</file>
+
+<file path=ppt/slides/slide20.xml><?xml version="1.0" encoding="utf-8"?>
+<p:sld xmlns:a="http://schemas.openxmlformats.org/drawingml/2006/main" xmlns:r="http://schemas.openxmlformats.org/officeDocument/2006/relationships" xmlns:p="http://schemas.openxmlformats.org/presentationml/2006/main">
+  <p:cSld>
+    <p:spTree>
+      <p:nvGrpSpPr>
+        <p:cNvPr id="1" name="">
+          <a:extLst>
+            <a:ext uri="{FF2B5EF4-FFF2-40B4-BE49-F238E27FC236}">
+              <a16:creationId xmlns:a16="http://schemas.microsoft.com/office/drawing/2014/main" id="{62943BD3-54C3-68BB-1955-91E138C6C670}"/>
+            </a:ext>
+          </a:extLst>
+        </p:cNvPr>
+        <p:cNvGrpSpPr/>
+        <p:nvPr/>
+      </p:nvGrpSpPr>
+      <p:grpSpPr>
+        <a:xfrm>
+          <a:off x="0" y="0"/>
+          <a:ext cx="0" cy="0"/>
+          <a:chOff x="0" y="0"/>
+          <a:chExt cx="0" cy="0"/>
+        </a:xfrm>
+      </p:grpSpPr>
+      <p:sp>
+        <p:nvSpPr>
+          <p:cNvPr id="14340" name="WordArt 5">
+            <a:extLst>
+              <a:ext uri="{FF2B5EF4-FFF2-40B4-BE49-F238E27FC236}">
+                <a16:creationId xmlns:a16="http://schemas.microsoft.com/office/drawing/2014/main" id="{D03C2BC2-E01F-D479-145D-85FA88938AEA}"/>
+              </a:ext>
+            </a:extLst>
+          </p:cNvPr>
+          <p:cNvSpPr>
+            <a:spLocks noGrp="1" noChangeArrowheads="1" noChangeShapeType="1" noTextEdit="1"/>
+          </p:cNvSpPr>
+          <p:nvPr>
+            <p:ph type="title" idx="4294967295"/>
+          </p:nvPr>
+        </p:nvSpPr>
+        <p:spPr bwMode="auto">
+          <a:xfrm>
+            <a:off x="1219200" y="381000"/>
+            <a:ext cx="6477000" cy="914400"/>
+          </a:xfrm>
+          <a:prstGeom prst="rect">
+            <a:avLst/>
+          </a:prstGeom>
+          <a:noFill/>
+          <a:ln>
+            <a:noFill/>
+            <a:prstDash/>
+          </a:ln>
+          <a:effectLst/>
+        </p:spPr>
+        <p:txBody>
+          <a:bodyPr rot="0" spcFirstLastPara="0" vertOverflow="overflow" horzOverflow="overflow" vert="horz" wrap="none" lIns="91440" tIns="45720" rIns="91440" bIns="45720" numCol="1" spcCol="0" rtlCol="0" fromWordArt="1" anchor="t" anchorCtr="0" forceAA="0" compatLnSpc="1">
+            <a:prstTxWarp prst="textPlain">
+              <a:avLst>
+                <a:gd name="adj" fmla="val 50000"/>
+              </a:avLst>
+            </a:prstTxWarp>
+            <a:noAutofit/>
+          </a:bodyPr>
+          <a:lstStyle/>
+          <a:p>
+            <a:pPr marL="0" marR="0" lvl="0" indent="0" algn="ctr" defTabSz="914400" rtl="0" eaLnBrk="0" fontAlgn="base" latinLnBrk="0" hangingPunct="0">
+              <a:lnSpc>
+                <a:spcPct val="100000"/>
+              </a:lnSpc>
+              <a:spcBef>
+                <a:spcPct val="0"/>
+              </a:spcBef>
+              <a:spcAft>
+                <a:spcPct val="0"/>
+              </a:spcAft>
+              <a:buClrTx/>
+              <a:buSzTx/>
+              <a:buFontTx/>
+              <a:buNone/>
+              <a:tabLst/>
+              <a:defRPr/>
+            </a:pPr>
+            <a:r>
+              <a:rPr kumimoji="0" lang="en-US" sz="3600" b="1" i="0" u="none" strike="noStrike" kern="10" cap="none" spc="0" normalizeH="0" baseline="0" noProof="0" dirty="0" err="1">
+                <a:ln w="12700">
+                  <a:solidFill>
+                    <a:srgbClr val="EAEAEA"/>
+                  </a:solidFill>
+                  <a:round/>
+                  <a:headEnd/>
+                  <a:tailEnd/>
+                </a:ln>
+                <a:gradFill rotWithShape="1">
+                  <a:gsLst>
+                    <a:gs pos="0">
+                      <a:srgbClr val="A603AB"/>
+                    </a:gs>
+                    <a:gs pos="12000">
+                      <a:srgbClr val="E81766"/>
+                    </a:gs>
+                    <a:gs pos="27000">
+                      <a:srgbClr val="EE3F17"/>
+                    </a:gs>
+                    <a:gs pos="48000">
+                      <a:srgbClr val="FFFF00"/>
+                    </a:gs>
+                    <a:gs pos="64999">
+                      <a:srgbClr val="1A8D48"/>
+                    </a:gs>
+                    <a:gs pos="78999">
+                      <a:srgbClr val="0819FB"/>
+                    </a:gs>
+                    <a:gs pos="100000">
+                      <a:srgbClr val="A603AB"/>
+                    </a:gs>
+                  </a:gsLst>
+                  <a:lin ang="0" scaled="1"/>
+                </a:gradFill>
+                <a:effectLst>
+                  <a:outerShdw dist="35921" dir="2700000" sy="50000" kx="2115830" algn="bl" rotWithShape="0">
+                    <a:srgbClr val="C0C0C0">
+                      <a:alpha val="79999"/>
+                    </a:srgbClr>
+                  </a:outerShdw>
+                </a:effectLst>
+                <a:uLnTx/>
+                <a:uFillTx/>
+                <a:latin typeface="Arial Black" panose="020B0A04020102020204" pitchFamily="34" charset="0"/>
+                <a:ea typeface="+mn-ea"/>
+                <a:cs typeface="+mn-cs"/>
+              </a:rPr>
+              <a:t>isEmpty</a:t>
+            </a:r>
+            <a:endParaRPr kumimoji="0" lang="en-US" sz="3600" b="1" i="0" u="none" strike="noStrike" kern="10" cap="none" spc="0" normalizeH="0" baseline="0" noProof="0" dirty="0">
+              <a:ln w="12700">
+                <a:solidFill>
+                  <a:srgbClr val="EAEAEA"/>
+                </a:solidFill>
+                <a:round/>
+                <a:headEnd/>
+                <a:tailEnd/>
+              </a:ln>
+              <a:gradFill rotWithShape="1">
+                <a:gsLst>
+                  <a:gs pos="0">
+                    <a:srgbClr val="A603AB"/>
+                  </a:gs>
+                  <a:gs pos="12000">
+                    <a:srgbClr val="E81766"/>
+                  </a:gs>
+                  <a:gs pos="27000">
+                    <a:srgbClr val="EE3F17"/>
+                  </a:gs>
+                  <a:gs pos="48000">
+                    <a:srgbClr val="FFFF00"/>
+                  </a:gs>
+                  <a:gs pos="64999">
+                    <a:srgbClr val="1A8D48"/>
+                  </a:gs>
+                  <a:gs pos="78999">
+                    <a:srgbClr val="0819FB"/>
+                  </a:gs>
+                  <a:gs pos="100000">
+                    <a:srgbClr val="A603AB"/>
+                  </a:gs>
+                </a:gsLst>
+                <a:lin ang="0" scaled="1"/>
+              </a:gradFill>
+              <a:effectLst>
+                <a:outerShdw dist="35921" dir="2700000" sy="50000" kx="2115830" algn="bl" rotWithShape="0">
+                  <a:srgbClr val="C0C0C0">
+                    <a:alpha val="79999"/>
+                  </a:srgbClr>
+                </a:outerShdw>
+              </a:effectLst>
+              <a:uLnTx/>
+              <a:uFillTx/>
+              <a:latin typeface="Arial Black" panose="020B0A04020102020204" pitchFamily="34" charset="0"/>
+              <a:ea typeface="+mn-ea"/>
+              <a:cs typeface="+mn-cs"/>
+            </a:endParaRPr>
+          </a:p>
+        </p:txBody>
+      </p:sp>
+      <p:sp>
+        <p:nvSpPr>
+          <p:cNvPr id="14339" name="Text Box 2">
+            <a:extLst>
+              <a:ext uri="{FF2B5EF4-FFF2-40B4-BE49-F238E27FC236}">
+                <a16:creationId xmlns:a16="http://schemas.microsoft.com/office/drawing/2014/main" id="{8A5E9802-4C74-A913-1CA1-4C80AC040990}"/>
+              </a:ext>
+            </a:extLst>
+          </p:cNvPr>
+          <p:cNvSpPr txBox="1">
+            <a:spLocks noChangeArrowheads="1"/>
+          </p:cNvSpPr>
+          <p:nvPr/>
+        </p:nvSpPr>
+        <p:spPr bwMode="auto">
+          <a:xfrm>
+            <a:off x="609600" y="1600200"/>
+            <a:ext cx="8077200" cy="5216525"/>
+          </a:xfrm>
+          <a:prstGeom prst="rect">
+            <a:avLst/>
+          </a:prstGeom>
+          <a:noFill/>
+          <a:ln>
+            <a:noFill/>
+          </a:ln>
+          <a:effectLst/>
+          <a:extLst>
+            <a:ext uri="{909E8E84-426E-40DD-AFC4-6F175D3DCCD1}">
+              <a14:hiddenFill xmlns:a14="http://schemas.microsoft.com/office/drawing/2010/main">
+                <a:solidFill>
+                  <a:schemeClr val="accent1"/>
+                </a:solidFill>
+              </a14:hiddenFill>
+            </a:ext>
+            <a:ext uri="{91240B29-F687-4F45-9708-019B960494DF}">
+              <a14:hiddenLine xmlns:a14="http://schemas.microsoft.com/office/drawing/2010/main" w="9525">
+                <a:solidFill>
+                  <a:schemeClr val="tx1"/>
+                </a:solidFill>
+                <a:miter lim="800000"/>
+                <a:headEnd/>
+                <a:tailEnd/>
+              </a14:hiddenLine>
+            </a:ext>
+            <a:ext uri="{AF507438-7753-43E0-B8FC-AC1667EBCBE1}">
+              <a14:hiddenEffects xmlns:a14="http://schemas.microsoft.com/office/drawing/2010/main">
+                <a:effectLst>
+                  <a:outerShdw dist="35921" dir="2700000" algn="ctr" rotWithShape="0">
+                    <a:schemeClr val="bg2"/>
+                  </a:outerShdw>
+                </a:effectLst>
+              </a14:hiddenEffects>
+            </a:ext>
+          </a:extLst>
+        </p:spPr>
+        <p:txBody>
+          <a:bodyPr>
+            <a:spAutoFit/>
+          </a:bodyPr>
+          <a:lstStyle>
+            <a:lvl1pPr>
+              <a:spcBef>
+                <a:spcPct val="20000"/>
+              </a:spcBef>
+              <a:buChar char="•"/>
+              <a:defRPr sz="3200">
+                <a:solidFill>
+                  <a:schemeClr val="tx1"/>
+                </a:solidFill>
+                <a:latin typeface="Times New Roman" panose="02020603050405020304" pitchFamily="18" charset="0"/>
+              </a:defRPr>
+            </a:lvl1pPr>
+            <a:lvl2pPr marL="742950" indent="-285750">
+              <a:spcBef>
+                <a:spcPct val="20000"/>
+              </a:spcBef>
+              <a:buChar char="–"/>
+              <a:defRPr sz="2800">
+                <a:solidFill>
+                  <a:schemeClr val="tx1"/>
+                </a:solidFill>
+                <a:latin typeface="Times New Roman" panose="02020603050405020304" pitchFamily="18" charset="0"/>
+              </a:defRPr>
+            </a:lvl2pPr>
+            <a:lvl3pPr marL="1143000" indent="-228600">
+              <a:spcBef>
+                <a:spcPct val="20000"/>
+              </a:spcBef>
+              <a:buChar char="•"/>
+              <a:defRPr sz="2400">
+                <a:solidFill>
+                  <a:schemeClr val="tx1"/>
+                </a:solidFill>
+                <a:latin typeface="Times New Roman" panose="02020603050405020304" pitchFamily="18" charset="0"/>
+              </a:defRPr>
+            </a:lvl3pPr>
+            <a:lvl4pPr marL="1600200" indent="-228600">
+              <a:spcBef>
+                <a:spcPct val="20000"/>
+              </a:spcBef>
+              <a:buChar char="–"/>
+              <a:defRPr sz="2000">
+                <a:solidFill>
+                  <a:schemeClr val="tx1"/>
+                </a:solidFill>
+                <a:latin typeface="Times New Roman" panose="02020603050405020304" pitchFamily="18" charset="0"/>
+              </a:defRPr>
+            </a:lvl4pPr>
+            <a:lvl5pPr marL="2057400" indent="-228600">
+              <a:spcBef>
+                <a:spcPct val="20000"/>
+              </a:spcBef>
+              <a:buChar char="»"/>
+              <a:defRPr sz="2000">
+                <a:solidFill>
+                  <a:schemeClr val="tx1"/>
+                </a:solidFill>
+                <a:latin typeface="Times New Roman" panose="02020603050405020304" pitchFamily="18" charset="0"/>
+              </a:defRPr>
+            </a:lvl5pPr>
+            <a:lvl6pPr marL="2514600" indent="-228600" eaLnBrk="0" fontAlgn="base" hangingPunct="0">
+              <a:spcBef>
+                <a:spcPct val="20000"/>
+              </a:spcBef>
+              <a:spcAft>
+                <a:spcPct val="0"/>
+              </a:spcAft>
+              <a:buChar char="»"/>
+              <a:defRPr sz="2000">
+                <a:solidFill>
+                  <a:schemeClr val="tx1"/>
+                </a:solidFill>
+                <a:latin typeface="Times New Roman" panose="02020603050405020304" pitchFamily="18" charset="0"/>
+              </a:defRPr>
+            </a:lvl6pPr>
+            <a:lvl7pPr marL="2971800" indent="-228600" eaLnBrk="0" fontAlgn="base" hangingPunct="0">
+              <a:spcBef>
+                <a:spcPct val="20000"/>
+              </a:spcBef>
+              <a:spcAft>
+                <a:spcPct val="0"/>
+              </a:spcAft>
+              <a:buChar char="»"/>
+              <a:defRPr sz="2000">
+                <a:solidFill>
+                  <a:schemeClr val="tx1"/>
+                </a:solidFill>
+                <a:latin typeface="Times New Roman" panose="02020603050405020304" pitchFamily="18" charset="0"/>
+              </a:defRPr>
+            </a:lvl7pPr>
+            <a:lvl8pPr marL="3429000" indent="-228600" eaLnBrk="0" fontAlgn="base" hangingPunct="0">
+              <a:spcBef>
+                <a:spcPct val="20000"/>
+              </a:spcBef>
+              <a:spcAft>
+                <a:spcPct val="0"/>
+              </a:spcAft>
+              <a:buChar char="»"/>
+              <a:defRPr sz="2000">
+                <a:solidFill>
+                  <a:schemeClr val="tx1"/>
+                </a:solidFill>
+                <a:latin typeface="Times New Roman" panose="02020603050405020304" pitchFamily="18" charset="0"/>
+              </a:defRPr>
+            </a:lvl8pPr>
+            <a:lvl9pPr marL="3886200" indent="-228600" eaLnBrk="0" fontAlgn="base" hangingPunct="0">
+              <a:spcBef>
+                <a:spcPct val="20000"/>
+              </a:spcBef>
+              <a:spcAft>
+                <a:spcPct val="0"/>
+              </a:spcAft>
+              <a:buChar char="»"/>
+              <a:defRPr sz="2000">
+                <a:solidFill>
+                  <a:schemeClr val="tx1"/>
+                </a:solidFill>
+                <a:latin typeface="Times New Roman" panose="02020603050405020304" pitchFamily="18" charset="0"/>
+              </a:defRPr>
+            </a:lvl9pPr>
+          </a:lstStyle>
+          <a:p>
+            <a:pPr>
+              <a:spcBef>
+                <a:spcPct val="0"/>
+              </a:spcBef>
+              <a:buFontTx/>
+              <a:buNone/>
+            </a:pPr>
+            <a:r>
+              <a:rPr lang="en-US" altLang="en-US" sz="2800" dirty="0" err="1">
+                <a:latin typeface="Tahoma" panose="020B0604030504040204" pitchFamily="34" charset="0"/>
+              </a:rPr>
+              <a:t>PriorityQueue</a:t>
+            </a:r>
+            <a:r>
+              <a:rPr lang="en-US" altLang="en-US" sz="2800" dirty="0">
+                <a:latin typeface="Tahoma" panose="020B0604030504040204" pitchFamily="34" charset="0"/>
+              </a:rPr>
+              <a:t>&lt;Integer&gt; </a:t>
+            </a:r>
+            <a:r>
+              <a:rPr lang="en-US" altLang="en-US" sz="2800" dirty="0" err="1">
+                <a:latin typeface="Tahoma" panose="020B0604030504040204" pitchFamily="34" charset="0"/>
+              </a:rPr>
+              <a:t>pQueue</a:t>
+            </a:r>
+            <a:r>
+              <a:rPr lang="en-US" altLang="en-US" sz="2800" dirty="0">
+                <a:latin typeface="Tahoma" panose="020B0604030504040204" pitchFamily="34" charset="0"/>
+              </a:rPr>
+              <a:t>;</a:t>
+            </a:r>
+          </a:p>
+          <a:p>
+            <a:pPr>
+              <a:spcBef>
+                <a:spcPct val="0"/>
+              </a:spcBef>
+              <a:buFontTx/>
+              <a:buNone/>
+            </a:pPr>
+            <a:r>
+              <a:rPr lang="en-US" altLang="en-US" sz="2800" dirty="0" err="1">
+                <a:latin typeface="Tahoma" panose="020B0604030504040204" pitchFamily="34" charset="0"/>
+              </a:rPr>
+              <a:t>pQueue</a:t>
+            </a:r>
+            <a:r>
+              <a:rPr lang="en-US" altLang="en-US" sz="2800" dirty="0">
+                <a:latin typeface="Tahoma" panose="020B0604030504040204" pitchFamily="34" charset="0"/>
+              </a:rPr>
+              <a:t> = new </a:t>
+            </a:r>
+            <a:r>
+              <a:rPr lang="en-US" altLang="en-US" sz="2800" dirty="0" err="1">
+                <a:latin typeface="Tahoma" panose="020B0604030504040204" pitchFamily="34" charset="0"/>
+              </a:rPr>
+              <a:t>PriorityQueue</a:t>
+            </a:r>
+            <a:r>
+              <a:rPr lang="en-US" altLang="en-US" sz="2800" dirty="0">
+                <a:latin typeface="Tahoma" panose="020B0604030504040204" pitchFamily="34" charset="0"/>
+              </a:rPr>
+              <a:t>&lt;&gt;();</a:t>
+            </a:r>
+            <a:br>
+              <a:rPr lang="en-US" altLang="en-US" sz="2800" dirty="0">
+                <a:latin typeface="Tahoma" panose="020B0604030504040204" pitchFamily="34" charset="0"/>
+              </a:rPr>
+            </a:br>
+            <a:endParaRPr lang="en-US" altLang="en-US" sz="2800" dirty="0">
+              <a:latin typeface="Tahoma" panose="020B0604030504040204" pitchFamily="34" charset="0"/>
+            </a:endParaRPr>
+          </a:p>
+          <a:p>
+            <a:pPr>
+              <a:spcBef>
+                <a:spcPct val="0"/>
+              </a:spcBef>
+              <a:buFontTx/>
+              <a:buNone/>
+            </a:pPr>
+            <a:r>
+              <a:rPr lang="en-US" altLang="en-US" sz="2800" dirty="0" err="1">
+                <a:latin typeface="Tahoma" panose="020B0604030504040204" pitchFamily="34" charset="0"/>
+              </a:rPr>
+              <a:t>pQueue.offer</a:t>
+            </a:r>
+            <a:r>
+              <a:rPr lang="en-US" altLang="en-US" sz="2800" dirty="0">
+                <a:latin typeface="Tahoma" panose="020B0604030504040204" pitchFamily="34" charset="0"/>
+              </a:rPr>
+              <a:t>(11);</a:t>
+            </a:r>
+          </a:p>
+          <a:p>
+            <a:pPr>
+              <a:spcBef>
+                <a:spcPct val="0"/>
+              </a:spcBef>
+              <a:buFontTx/>
+              <a:buNone/>
+            </a:pPr>
+            <a:r>
+              <a:rPr lang="en-US" altLang="en-US" sz="2800" dirty="0" err="1">
+                <a:latin typeface="Tahoma" panose="020B0604030504040204" pitchFamily="34" charset="0"/>
+              </a:rPr>
+              <a:t>pQueue.offer</a:t>
+            </a:r>
+            <a:r>
+              <a:rPr lang="en-US" altLang="en-US" sz="2800" dirty="0">
+                <a:latin typeface="Tahoma" panose="020B0604030504040204" pitchFamily="34" charset="0"/>
+              </a:rPr>
+              <a:t>(10);</a:t>
+            </a:r>
+          </a:p>
+          <a:p>
+            <a:pPr>
+              <a:spcBef>
+                <a:spcPct val="0"/>
+              </a:spcBef>
+              <a:buFontTx/>
+              <a:buNone/>
+            </a:pPr>
+            <a:r>
+              <a:rPr lang="en-US" altLang="en-US" sz="2800" dirty="0" err="1">
+                <a:latin typeface="Tahoma" panose="020B0604030504040204" pitchFamily="34" charset="0"/>
+              </a:rPr>
+              <a:t>pQueue.offer</a:t>
+            </a:r>
+            <a:r>
+              <a:rPr lang="en-US" altLang="en-US" sz="2800" dirty="0">
+                <a:latin typeface="Tahoma" panose="020B0604030504040204" pitchFamily="34" charset="0"/>
+              </a:rPr>
+              <a:t>(7);</a:t>
+            </a:r>
+          </a:p>
+          <a:p>
+            <a:pPr>
+              <a:spcBef>
+                <a:spcPct val="0"/>
+              </a:spcBef>
+              <a:buFontTx/>
+              <a:buNone/>
+            </a:pPr>
+            <a:endParaRPr lang="en-US" altLang="en-US" sz="2800" dirty="0">
+              <a:latin typeface="Tahoma" panose="020B0604030504040204" pitchFamily="34" charset="0"/>
+            </a:endParaRPr>
+          </a:p>
+          <a:p>
+            <a:pPr>
+              <a:spcBef>
+                <a:spcPct val="0"/>
+              </a:spcBef>
+              <a:buFontTx/>
+              <a:buNone/>
+            </a:pPr>
+            <a:r>
+              <a:rPr lang="en-US" altLang="en-US" sz="2800" dirty="0">
+                <a:latin typeface="Tahoma" panose="020B0604030504040204" pitchFamily="34" charset="0"/>
+              </a:rPr>
+              <a:t>while(!</a:t>
+            </a:r>
+            <a:r>
+              <a:rPr lang="en-US" altLang="en-US" sz="2800" dirty="0" err="1">
+                <a:latin typeface="Tahoma" panose="020B0604030504040204" pitchFamily="34" charset="0"/>
+              </a:rPr>
+              <a:t>pQueue.isEmpty</a:t>
+            </a:r>
+            <a:r>
+              <a:rPr lang="en-US" altLang="en-US" sz="2800" dirty="0">
+                <a:latin typeface="Tahoma" panose="020B0604030504040204" pitchFamily="34" charset="0"/>
+              </a:rPr>
+              <a:t>())</a:t>
+            </a:r>
+          </a:p>
+          <a:p>
+            <a:pPr>
+              <a:spcBef>
+                <a:spcPct val="0"/>
+              </a:spcBef>
+              <a:buFontTx/>
+              <a:buNone/>
+            </a:pPr>
+            <a:r>
+              <a:rPr lang="en-US" altLang="en-US" sz="2800" dirty="0">
+                <a:latin typeface="Tahoma" panose="020B0604030504040204" pitchFamily="34" charset="0"/>
+              </a:rPr>
+              <a:t>{</a:t>
+            </a:r>
+          </a:p>
+          <a:p>
+            <a:pPr>
+              <a:spcBef>
+                <a:spcPct val="0"/>
+              </a:spcBef>
+              <a:buFontTx/>
+              <a:buNone/>
+            </a:pPr>
+            <a:r>
+              <a:rPr lang="en-US" altLang="en-US" sz="2800" dirty="0">
+                <a:latin typeface="Tahoma" panose="020B0604030504040204" pitchFamily="34" charset="0"/>
+              </a:rPr>
+              <a:t>   </a:t>
+            </a:r>
+            <a:r>
+              <a:rPr lang="en-US" altLang="en-US" sz="2800" dirty="0" err="1">
+                <a:latin typeface="Tahoma" panose="020B0604030504040204" pitchFamily="34" charset="0"/>
+              </a:rPr>
+              <a:t>out.println</a:t>
+            </a:r>
+            <a:r>
+              <a:rPr lang="en-US" altLang="en-US" sz="2800" dirty="0">
+                <a:latin typeface="Tahoma" panose="020B0604030504040204" pitchFamily="34" charset="0"/>
+              </a:rPr>
+              <a:t>(</a:t>
+            </a:r>
+            <a:r>
+              <a:rPr lang="en-US" altLang="en-US" sz="2800" dirty="0" err="1">
+                <a:latin typeface="Tahoma" panose="020B0604030504040204" pitchFamily="34" charset="0"/>
+              </a:rPr>
+              <a:t>pQueue.poll</a:t>
+            </a:r>
+            <a:r>
+              <a:rPr lang="en-US" altLang="en-US" sz="2800" dirty="0">
+                <a:latin typeface="Tahoma" panose="020B0604030504040204" pitchFamily="34" charset="0"/>
+              </a:rPr>
+              <a:t>());</a:t>
+            </a:r>
+          </a:p>
+          <a:p>
+            <a:pPr>
+              <a:spcBef>
+                <a:spcPct val="0"/>
+              </a:spcBef>
+              <a:buFontTx/>
+              <a:buNone/>
+            </a:pPr>
+            <a:r>
+              <a:rPr lang="en-US" altLang="en-US" sz="2800" dirty="0">
+                <a:latin typeface="Tahoma" panose="020B0604030504040204" pitchFamily="34" charset="0"/>
+              </a:rPr>
+              <a:t>}</a:t>
+            </a:r>
+          </a:p>
+          <a:p>
+            <a:pPr>
+              <a:spcBef>
+                <a:spcPct val="0"/>
+              </a:spcBef>
+              <a:buFontTx/>
+              <a:buNone/>
+            </a:pPr>
+            <a:endParaRPr lang="en-US" altLang="en-US" sz="2800" dirty="0">
+              <a:latin typeface="Tahoma" panose="020B0604030504040204" pitchFamily="34" charset="0"/>
+            </a:endParaRPr>
+          </a:p>
+        </p:txBody>
+      </p:sp>
+      <p:sp>
+        <p:nvSpPr>
+          <p:cNvPr id="14341" name="Text Box 6">
+            <a:extLst>
+              <a:ext uri="{FF2B5EF4-FFF2-40B4-BE49-F238E27FC236}">
+                <a16:creationId xmlns:a16="http://schemas.microsoft.com/office/drawing/2014/main" id="{4DEBE5E6-657C-1839-5054-28E9500C4C31}"/>
+              </a:ext>
+            </a:extLst>
+          </p:cNvPr>
+          <p:cNvSpPr txBox="1">
+            <a:spLocks noChangeArrowheads="1"/>
+          </p:cNvSpPr>
+          <p:nvPr/>
+        </p:nvSpPr>
+        <p:spPr bwMode="auto">
+          <a:xfrm>
+            <a:off x="6553200" y="3200400"/>
+            <a:ext cx="2362200" cy="2298700"/>
+          </a:xfrm>
+          <a:prstGeom prst="rect">
+            <a:avLst/>
+          </a:prstGeom>
+          <a:noFill/>
+          <a:ln w="12700">
+            <a:solidFill>
+              <a:srgbClr val="993300"/>
+            </a:solidFill>
+            <a:miter lim="800000"/>
+            <a:headEnd type="none" w="sm" len="sm"/>
+            <a:tailEnd type="none" w="sm" len="sm"/>
+          </a:ln>
+          <a:effectLst/>
+          <a:extLst>
+            <a:ext uri="{909E8E84-426E-40DD-AFC4-6F175D3DCCD1}">
+              <a14:hiddenFill xmlns:a14="http://schemas.microsoft.com/office/drawing/2010/main">
+                <a:solidFill>
+                  <a:schemeClr val="accent1"/>
+                </a:solidFill>
+              </a14:hiddenFill>
+            </a:ext>
+            <a:ext uri="{AF507438-7753-43E0-B8FC-AC1667EBCBE1}">
+              <a14:hiddenEffects xmlns:a14="http://schemas.microsoft.com/office/drawing/2010/main">
+                <a:effectLst>
+                  <a:outerShdw dist="35921" dir="2700000" algn="ctr" rotWithShape="0">
+                    <a:schemeClr val="bg2"/>
+                  </a:outerShdw>
+                </a:effectLst>
+              </a14:hiddenEffects>
+            </a:ext>
+          </a:extLst>
+        </p:spPr>
+        <p:txBody>
+          <a:bodyPr>
+            <a:spAutoFit/>
+          </a:bodyPr>
+          <a:lstStyle>
+            <a:lvl1pPr>
+              <a:spcBef>
+                <a:spcPct val="20000"/>
+              </a:spcBef>
+              <a:buChar char="•"/>
+              <a:defRPr sz="3200">
+                <a:solidFill>
+                  <a:schemeClr val="tx1"/>
+                </a:solidFill>
+                <a:latin typeface="Times New Roman" panose="02020603050405020304" pitchFamily="18" charset="0"/>
+              </a:defRPr>
+            </a:lvl1pPr>
+            <a:lvl2pPr marL="742950" indent="-285750">
+              <a:spcBef>
+                <a:spcPct val="20000"/>
+              </a:spcBef>
+              <a:buChar char="–"/>
+              <a:defRPr sz="2800">
+                <a:solidFill>
+                  <a:schemeClr val="tx1"/>
+                </a:solidFill>
+                <a:latin typeface="Times New Roman" panose="02020603050405020304" pitchFamily="18" charset="0"/>
+              </a:defRPr>
+            </a:lvl2pPr>
+            <a:lvl3pPr marL="1143000" indent="-228600">
+              <a:spcBef>
+                <a:spcPct val="20000"/>
+              </a:spcBef>
+              <a:buChar char="•"/>
+              <a:defRPr sz="2400">
+                <a:solidFill>
+                  <a:schemeClr val="tx1"/>
+                </a:solidFill>
+                <a:latin typeface="Times New Roman" panose="02020603050405020304" pitchFamily="18" charset="0"/>
+              </a:defRPr>
+            </a:lvl3pPr>
+            <a:lvl4pPr marL="1600200" indent="-228600">
+              <a:spcBef>
+                <a:spcPct val="20000"/>
+              </a:spcBef>
+              <a:buChar char="–"/>
+              <a:defRPr sz="2000">
+                <a:solidFill>
+                  <a:schemeClr val="tx1"/>
+                </a:solidFill>
+                <a:latin typeface="Times New Roman" panose="02020603050405020304" pitchFamily="18" charset="0"/>
+              </a:defRPr>
+            </a:lvl4pPr>
+            <a:lvl5pPr marL="2057400" indent="-228600">
+              <a:spcBef>
+                <a:spcPct val="20000"/>
+              </a:spcBef>
+              <a:buChar char="»"/>
+              <a:defRPr sz="2000">
+                <a:solidFill>
+                  <a:schemeClr val="tx1"/>
+                </a:solidFill>
+                <a:latin typeface="Times New Roman" panose="02020603050405020304" pitchFamily="18" charset="0"/>
+              </a:defRPr>
+            </a:lvl5pPr>
+            <a:lvl6pPr marL="2514600" indent="-228600" eaLnBrk="0" fontAlgn="base" hangingPunct="0">
+              <a:spcBef>
+                <a:spcPct val="20000"/>
+              </a:spcBef>
+              <a:spcAft>
+                <a:spcPct val="0"/>
+              </a:spcAft>
+              <a:buChar char="»"/>
+              <a:defRPr sz="2000">
+                <a:solidFill>
+                  <a:schemeClr val="tx1"/>
+                </a:solidFill>
+                <a:latin typeface="Times New Roman" panose="02020603050405020304" pitchFamily="18" charset="0"/>
+              </a:defRPr>
+            </a:lvl6pPr>
+            <a:lvl7pPr marL="2971800" indent="-228600" eaLnBrk="0" fontAlgn="base" hangingPunct="0">
+              <a:spcBef>
+                <a:spcPct val="20000"/>
+              </a:spcBef>
+              <a:spcAft>
+                <a:spcPct val="0"/>
+              </a:spcAft>
+              <a:buChar char="»"/>
+              <a:defRPr sz="2000">
+                <a:solidFill>
+                  <a:schemeClr val="tx1"/>
+                </a:solidFill>
+                <a:latin typeface="Times New Roman" panose="02020603050405020304" pitchFamily="18" charset="0"/>
+              </a:defRPr>
+            </a:lvl7pPr>
+            <a:lvl8pPr marL="3429000" indent="-228600" eaLnBrk="0" fontAlgn="base" hangingPunct="0">
+              <a:spcBef>
+                <a:spcPct val="20000"/>
+              </a:spcBef>
+              <a:spcAft>
+                <a:spcPct val="0"/>
+              </a:spcAft>
+              <a:buChar char="»"/>
+              <a:defRPr sz="2000">
+                <a:solidFill>
+                  <a:schemeClr val="tx1"/>
+                </a:solidFill>
+                <a:latin typeface="Times New Roman" panose="02020603050405020304" pitchFamily="18" charset="0"/>
+              </a:defRPr>
+            </a:lvl8pPr>
+            <a:lvl9pPr marL="3886200" indent="-228600" eaLnBrk="0" fontAlgn="base" hangingPunct="0">
+              <a:spcBef>
+                <a:spcPct val="20000"/>
+              </a:spcBef>
+              <a:spcAft>
+                <a:spcPct val="0"/>
+              </a:spcAft>
+              <a:buChar char="»"/>
+              <a:defRPr sz="2000">
+                <a:solidFill>
+                  <a:schemeClr val="tx1"/>
+                </a:solidFill>
+                <a:latin typeface="Times New Roman" panose="02020603050405020304" pitchFamily="18" charset="0"/>
+              </a:defRPr>
+            </a:lvl9pPr>
+          </a:lstStyle>
+          <a:p>
+            <a:pPr>
+              <a:spcBef>
+                <a:spcPct val="50000"/>
+              </a:spcBef>
+              <a:buFontTx/>
+              <a:buNone/>
+            </a:pPr>
+            <a:r>
+              <a:rPr lang="en-US" altLang="en-US" u="sng">
+                <a:solidFill>
+                  <a:srgbClr val="FF0000"/>
+                </a:solidFill>
+                <a:latin typeface="Tahoma" panose="020B0604030504040204" pitchFamily="34" charset="0"/>
+              </a:rPr>
+              <a:t>OUTPUT</a:t>
+            </a:r>
+          </a:p>
+          <a:p>
+            <a:pPr algn="ctr">
+              <a:spcBef>
+                <a:spcPct val="50000"/>
+              </a:spcBef>
+              <a:buFontTx/>
+              <a:buNone/>
+            </a:pPr>
+            <a:r>
+              <a:rPr lang="en-US" altLang="en-US">
+                <a:latin typeface="Tahoma" panose="020B0604030504040204" pitchFamily="34" charset="0"/>
+              </a:rPr>
+              <a:t>7</a:t>
+            </a:r>
+            <a:br>
+              <a:rPr lang="en-US" altLang="en-US">
+                <a:latin typeface="Tahoma" panose="020B0604030504040204" pitchFamily="34" charset="0"/>
+              </a:rPr>
+            </a:br>
+            <a:r>
+              <a:rPr lang="en-US" altLang="en-US">
+                <a:latin typeface="Tahoma" panose="020B0604030504040204" pitchFamily="34" charset="0"/>
+              </a:rPr>
+              <a:t>10</a:t>
+            </a:r>
+            <a:br>
+              <a:rPr lang="en-US" altLang="en-US">
+                <a:latin typeface="Tahoma" panose="020B0604030504040204" pitchFamily="34" charset="0"/>
+              </a:rPr>
+            </a:br>
+            <a:r>
+              <a:rPr lang="en-US" altLang="en-US">
+                <a:latin typeface="Tahoma" panose="020B0604030504040204" pitchFamily="34" charset="0"/>
+              </a:rPr>
+              <a:t>11</a:t>
+            </a:r>
+          </a:p>
+        </p:txBody>
+      </p:sp>
+      <p:sp>
+        <p:nvSpPr>
+          <p:cNvPr id="14338" name="Footer Placeholder 3">
+            <a:extLst>
+              <a:ext uri="{FF2B5EF4-FFF2-40B4-BE49-F238E27FC236}">
+                <a16:creationId xmlns:a16="http://schemas.microsoft.com/office/drawing/2014/main" id="{EE318792-0D66-2A14-7752-9942A41EC206}"/>
+              </a:ext>
+              <a:ext uri="{C183D7F6-B498-43B3-948B-1728B52AA6E4}">
+                <adec:decorative xmlns:adec="http://schemas.microsoft.com/office/drawing/2017/decorative" val="1"/>
+              </a:ext>
+            </a:extLst>
+          </p:cNvPr>
+          <p:cNvSpPr>
+            <a:spLocks noGrp="1"/>
+          </p:cNvSpPr>
+          <p:nvPr>
+            <p:ph type="ftr" sz="quarter" idx="12"/>
+          </p:nvPr>
+        </p:nvSpPr>
+        <p:spPr>
+          <a:noFill/>
+        </p:spPr>
+        <p:txBody>
+          <a:bodyPr/>
+          <a:lstStyle>
+            <a:lvl1pPr>
+              <a:spcBef>
+                <a:spcPct val="20000"/>
+              </a:spcBef>
+              <a:buChar char="•"/>
+              <a:defRPr sz="3200">
+                <a:solidFill>
+                  <a:schemeClr val="tx1"/>
+                </a:solidFill>
+                <a:latin typeface="Times New Roman" panose="02020603050405020304" pitchFamily="18" charset="0"/>
+              </a:defRPr>
+            </a:lvl1pPr>
+            <a:lvl2pPr marL="742950" indent="-285750">
+              <a:spcBef>
+                <a:spcPct val="20000"/>
+              </a:spcBef>
+              <a:buChar char="–"/>
+              <a:defRPr sz="2800">
+                <a:solidFill>
+                  <a:schemeClr val="tx1"/>
+                </a:solidFill>
+                <a:latin typeface="Times New Roman" panose="02020603050405020304" pitchFamily="18" charset="0"/>
+              </a:defRPr>
+            </a:lvl2pPr>
+            <a:lvl3pPr marL="1143000" indent="-228600">
+              <a:spcBef>
+                <a:spcPct val="20000"/>
+              </a:spcBef>
+              <a:buChar char="•"/>
+              <a:defRPr sz="2400">
+                <a:solidFill>
+                  <a:schemeClr val="tx1"/>
+                </a:solidFill>
+                <a:latin typeface="Times New Roman" panose="02020603050405020304" pitchFamily="18" charset="0"/>
+              </a:defRPr>
+            </a:lvl3pPr>
+            <a:lvl4pPr marL="1600200" indent="-228600">
+              <a:spcBef>
+                <a:spcPct val="20000"/>
+              </a:spcBef>
+              <a:buChar char="–"/>
+              <a:defRPr sz="2000">
+                <a:solidFill>
+                  <a:schemeClr val="tx1"/>
+                </a:solidFill>
+                <a:latin typeface="Times New Roman" panose="02020603050405020304" pitchFamily="18" charset="0"/>
+              </a:defRPr>
+            </a:lvl4pPr>
+            <a:lvl5pPr marL="2057400" indent="-228600">
+              <a:spcBef>
+                <a:spcPct val="20000"/>
+              </a:spcBef>
+              <a:buChar char="»"/>
+              <a:defRPr sz="2000">
+                <a:solidFill>
+                  <a:schemeClr val="tx1"/>
+                </a:solidFill>
+                <a:latin typeface="Times New Roman" panose="02020603050405020304" pitchFamily="18" charset="0"/>
+              </a:defRPr>
+            </a:lvl5pPr>
+            <a:lvl6pPr marL="2514600" indent="-228600" eaLnBrk="0" fontAlgn="base" hangingPunct="0">
+              <a:spcBef>
+                <a:spcPct val="20000"/>
+              </a:spcBef>
+              <a:spcAft>
+                <a:spcPct val="0"/>
+              </a:spcAft>
+              <a:buChar char="»"/>
+              <a:defRPr sz="2000">
+                <a:solidFill>
+                  <a:schemeClr val="tx1"/>
+                </a:solidFill>
+                <a:latin typeface="Times New Roman" panose="02020603050405020304" pitchFamily="18" charset="0"/>
+              </a:defRPr>
+            </a:lvl6pPr>
+            <a:lvl7pPr marL="2971800" indent="-228600" eaLnBrk="0" fontAlgn="base" hangingPunct="0">
+              <a:spcBef>
+                <a:spcPct val="20000"/>
+              </a:spcBef>
+              <a:spcAft>
+                <a:spcPct val="0"/>
+              </a:spcAft>
+              <a:buChar char="»"/>
+              <a:defRPr sz="2000">
+                <a:solidFill>
+                  <a:schemeClr val="tx1"/>
+                </a:solidFill>
+                <a:latin typeface="Times New Roman" panose="02020603050405020304" pitchFamily="18" charset="0"/>
+              </a:defRPr>
+            </a:lvl7pPr>
+            <a:lvl8pPr marL="3429000" indent="-228600" eaLnBrk="0" fontAlgn="base" hangingPunct="0">
+              <a:spcBef>
+                <a:spcPct val="20000"/>
+              </a:spcBef>
+              <a:spcAft>
+                <a:spcPct val="0"/>
+              </a:spcAft>
+              <a:buChar char="»"/>
+              <a:defRPr sz="2000">
+                <a:solidFill>
+                  <a:schemeClr val="tx1"/>
+                </a:solidFill>
+                <a:latin typeface="Times New Roman" panose="02020603050405020304" pitchFamily="18" charset="0"/>
+              </a:defRPr>
+            </a:lvl8pPr>
+            <a:lvl9pPr marL="3886200" indent="-228600" eaLnBrk="0" fontAlgn="base" hangingPunct="0">
+              <a:spcBef>
+                <a:spcPct val="20000"/>
+              </a:spcBef>
+              <a:spcAft>
+                <a:spcPct val="0"/>
+              </a:spcAft>
+              <a:buChar char="»"/>
+              <a:defRPr sz="2000">
+                <a:solidFill>
+                  <a:schemeClr val="tx1"/>
+                </a:solidFill>
+                <a:latin typeface="Times New Roman" panose="02020603050405020304" pitchFamily="18" charset="0"/>
+              </a:defRPr>
+            </a:lvl9pPr>
+          </a:lstStyle>
+          <a:p>
+            <a:pPr>
+              <a:spcBef>
+                <a:spcPct val="0"/>
+              </a:spcBef>
+              <a:buFontTx/>
+              <a:buNone/>
+            </a:pPr>
+            <a:endParaRPr lang="en-US" altLang="en-US" sz="800" b="1"/>
+          </a:p>
+          <a:p>
+            <a:pPr>
+              <a:spcBef>
+                <a:spcPct val="0"/>
+              </a:spcBef>
+              <a:buFontTx/>
+              <a:buNone/>
+            </a:pPr>
+            <a:endParaRPr lang="en-US" altLang="en-US" sz="800">
+              <a:latin typeface="Tahoma" panose="020B0604030504040204" pitchFamily="34" charset="0"/>
+            </a:endParaRPr>
+          </a:p>
+          <a:p>
+            <a:pPr>
+              <a:spcBef>
+                <a:spcPct val="0"/>
+              </a:spcBef>
+              <a:buFontTx/>
+              <a:buNone/>
+            </a:pPr>
+            <a:endParaRPr lang="en-US" altLang="en-US" sz="800" b="1">
+              <a:latin typeface="Tahoma" panose="020B0604030504040204" pitchFamily="34" charset="0"/>
+            </a:endParaRPr>
+          </a:p>
+          <a:p>
+            <a:pPr>
+              <a:spcBef>
+                <a:spcPct val="0"/>
+              </a:spcBef>
+              <a:buFontTx/>
+              <a:buNone/>
+            </a:pPr>
+            <a:r>
+              <a:rPr lang="en-US" altLang="en-US" sz="800" b="1">
+                <a:latin typeface="Tahoma" panose="020B0604030504040204" pitchFamily="34" charset="0"/>
+              </a:rPr>
+              <a:t>© A+ Computer Science  -  www.apluscompsci.com</a:t>
+            </a:r>
+          </a:p>
+        </p:txBody>
+      </p:sp>
+    </p:spTree>
+    <p:extLst>
+      <p:ext uri="{BB962C8B-B14F-4D97-AF65-F5344CB8AC3E}">
+        <p14:creationId xmlns:p14="http://schemas.microsoft.com/office/powerpoint/2010/main" val="4239271318"/>
+      </p:ext>
+    </p:extLst>
   </p:cSld>
   <p:clrMapOvr>
     <a:masterClrMapping/>
